--- a/Major 2/Karatsuba Multiplication Algorithm final.pptx
+++ b/Major 2/Karatsuba Multiplication Algorithm final.pptx
@@ -15,11 +15,10 @@
     <p:sldId id="264" r:id="rId9"/>
     <p:sldId id="273" r:id="rId10"/>
     <p:sldId id="266" r:id="rId11"/>
-    <p:sldId id="267" r:id="rId12"/>
-    <p:sldId id="270" r:id="rId13"/>
-    <p:sldId id="269" r:id="rId14"/>
-    <p:sldId id="271" r:id="rId15"/>
-    <p:sldId id="272" r:id="rId16"/>
+    <p:sldId id="270" r:id="rId12"/>
+    <p:sldId id="269" r:id="rId13"/>
+    <p:sldId id="271" r:id="rId14"/>
+    <p:sldId id="272" r:id="rId15"/>
   </p:sldIdLst>
   <p:sldSz cx="12192000" cy="6858000"/>
   <p:notesSz cx="6858000" cy="9144000"/>
@@ -316,7 +315,7 @@
           <a:p>
             <a:fld id="{5BCAD085-E8A6-8845-BD4E-CB4CCA059FC4}" type="datetimeFigureOut">
               <a:rPr lang="en-US" smtClean="0"/>
-              <a:t>9/8/2026</a:t>
+              <a:t>9/16/2026</a:t>
             </a:fld>
             <a:endParaRPr lang="en-US"/>
           </a:p>
@@ -479,7 +478,7 @@
           <a:p>
             <a:fld id="{5BCAD085-E8A6-8845-BD4E-CB4CCA059FC4}" type="datetimeFigureOut">
               <a:rPr lang="en-US" smtClean="0"/>
-              <a:t>9/8/2026</a:t>
+              <a:t>9/16/2026</a:t>
             </a:fld>
             <a:endParaRPr lang="en-US"/>
           </a:p>
@@ -652,7 +651,7 @@
           <a:p>
             <a:fld id="{5BCAD085-E8A6-8845-BD4E-CB4CCA059FC4}" type="datetimeFigureOut">
               <a:rPr lang="en-US" smtClean="0"/>
-              <a:t>9/8/2026</a:t>
+              <a:t>9/16/2026</a:t>
             </a:fld>
             <a:endParaRPr lang="en-US"/>
           </a:p>
@@ -815,7 +814,7 @@
           <a:p>
             <a:fld id="{5BCAD085-E8A6-8845-BD4E-CB4CCA059FC4}" type="datetimeFigureOut">
               <a:rPr lang="en-US" smtClean="0"/>
-              <a:t>9/8/2026</a:t>
+              <a:t>9/16/2026</a:t>
             </a:fld>
             <a:endParaRPr lang="en-US"/>
           </a:p>
@@ -1055,7 +1054,7 @@
           <a:p>
             <a:fld id="{5BCAD085-E8A6-8845-BD4E-CB4CCA059FC4}" type="datetimeFigureOut">
               <a:rPr lang="en-US" smtClean="0"/>
-              <a:t>9/8/2026</a:t>
+              <a:t>9/16/2026</a:t>
             </a:fld>
             <a:endParaRPr lang="en-US"/>
           </a:p>
@@ -1335,7 +1334,7 @@
           <a:p>
             <a:fld id="{5BCAD085-E8A6-8845-BD4E-CB4CCA059FC4}" type="datetimeFigureOut">
               <a:rPr lang="en-US" smtClean="0"/>
-              <a:t>9/8/2026</a:t>
+              <a:t>9/16/2026</a:t>
             </a:fld>
             <a:endParaRPr lang="en-US"/>
           </a:p>
@@ -1749,7 +1748,7 @@
           <a:p>
             <a:fld id="{5BCAD085-E8A6-8845-BD4E-CB4CCA059FC4}" type="datetimeFigureOut">
               <a:rPr lang="en-US" smtClean="0"/>
-              <a:t>9/8/2026</a:t>
+              <a:t>9/16/2026</a:t>
             </a:fld>
             <a:endParaRPr lang="en-US"/>
           </a:p>
@@ -1861,7 +1860,7 @@
           <a:p>
             <a:fld id="{5BCAD085-E8A6-8845-BD4E-CB4CCA059FC4}" type="datetimeFigureOut">
               <a:rPr lang="en-US" smtClean="0"/>
-              <a:t>9/8/2026</a:t>
+              <a:t>9/16/2026</a:t>
             </a:fld>
             <a:endParaRPr lang="en-US"/>
           </a:p>
@@ -1951,7 +1950,7 @@
           <a:p>
             <a:fld id="{5BCAD085-E8A6-8845-BD4E-CB4CCA059FC4}" type="datetimeFigureOut">
               <a:rPr lang="en-US" smtClean="0"/>
-              <a:t>9/8/2026</a:t>
+              <a:t>9/16/2026</a:t>
             </a:fld>
             <a:endParaRPr lang="en-US"/>
           </a:p>
@@ -2221,7 +2220,7 @@
           <a:p>
             <a:fld id="{5BCAD085-E8A6-8845-BD4E-CB4CCA059FC4}" type="datetimeFigureOut">
               <a:rPr lang="en-US" smtClean="0"/>
-              <a:t>9/8/2026</a:t>
+              <a:t>9/16/2026</a:t>
             </a:fld>
             <a:endParaRPr lang="en-US"/>
           </a:p>
@@ -2468,7 +2467,7 @@
           <a:p>
             <a:fld id="{5BCAD085-E8A6-8845-BD4E-CB4CCA059FC4}" type="datetimeFigureOut">
               <a:rPr lang="en-US" smtClean="0"/>
-              <a:t>9/8/2026</a:t>
+              <a:t>9/16/2026</a:t>
             </a:fld>
             <a:endParaRPr lang="en-US"/>
           </a:p>
@@ -2674,7 +2673,7 @@
           <a:p>
             <a:fld id="{5BCAD085-E8A6-8845-BD4E-CB4CCA059FC4}" type="datetimeFigureOut">
               <a:rPr lang="en-US" smtClean="0"/>
-              <a:t>9/8/2026</a:t>
+              <a:t>9/16/2026</a:t>
             </a:fld>
             <a:endParaRPr lang="en-US"/>
           </a:p>
@@ -3642,7 +3641,7 @@
         <p:spPr>
           <a:xfrm>
             <a:off x="962025" y="1733550"/>
-            <a:ext cx="4762500" cy="431800"/>
+            <a:ext cx="4762500" cy="369332"/>
           </a:xfrm>
           <a:prstGeom prst="rect">
             <a:avLst/>
@@ -3655,172 +3654,251 @@
           </a:bodyPr>
           <a:lstStyle/>
           <a:p>
-            <a:pPr algn="l">
-              <a:lnSpc>
-                <a:spcPts val="1685"/>
-              </a:lnSpc>
-            </a:pPr>
-            <a:r>
-              <a:rPr sz="1125" b="1" i="0" u="none">
+            <a:r>
+              <a:rPr sz="1125" b="1" i="0" u="none" dirty="0">
                 <a:solidFill>
                   <a:srgbClr val="475569"/>
                 </a:solidFill>
                 <a:latin typeface="Inter"/>
               </a:rPr>
-              <a:t>Sub-quadratic Speed:</a:t>
-            </a:r>
-            <a:r>
-              <a:rPr sz="1125" b="0" i="0" u="none">
+              <a:t>S</a:t>
+            </a:r>
+            <a:r>
+              <a:rPr lang="en-IN" sz="1200" b="1"/>
+              <a:t>Faster for large numbers:</a:t>
+            </a:r>
+            <a:r>
+              <a:rPr lang="en-IN" sz="1200"/>
+              <a:t> Karatsuba is faster than traditional multiplication when the numbers are large.</a:t>
+            </a:r>
+            <a:endParaRPr sz="1125" b="0" i="0" u="none">
+              <a:solidFill>
+                <a:srgbClr val="475569"/>
+              </a:solidFill>
+              <a:latin typeface="Inter"/>
+            </a:endParaRPr>
+          </a:p>
+        </p:txBody>
+      </p:sp>
+      <mc:AlternateContent xmlns:mc="http://schemas.openxmlformats.org/markup-compatibility/2006" xmlns:a14="http://schemas.microsoft.com/office/drawing/2010/main">
+        <mc:Choice Requires="a14">
+          <p:sp>
+            <p:nvSpPr>
+              <p:cNvPr id="14" name="TextBox 13"/>
+              <p:cNvSpPr txBox="1"/>
+              <p:nvPr/>
+            </p:nvSpPr>
+            <p:spPr>
+              <a:xfrm>
+                <a:off x="962025" y="2238375"/>
+                <a:ext cx="4762500" cy="625299"/>
+              </a:xfrm>
+              <a:prstGeom prst="rect">
+                <a:avLst/>
+              </a:prstGeom>
+              <a:noFill/>
+            </p:spPr>
+            <p:txBody>
+              <a:bodyPr wrap="square" lIns="0" tIns="0" rIns="0" bIns="0" anchor="t">
+                <a:spAutoFit/>
+              </a:bodyPr>
+              <a:lstStyle/>
+              <a:p>
+                <a:r>
+                  <a:rPr lang="en-IN" sz="1200" b="1" dirty="0"/>
+                  <a:t>Better time complexity:</a:t>
+                </a:r>
+                <a:r>
+                  <a:rPr lang="en-IN" sz="1200" dirty="0"/>
+                  <a:t> It has a time complexity of </a:t>
+                </a:r>
+                <a14:m>
+                  <m:oMath xmlns:m="http://schemas.openxmlformats.org/officeDocument/2006/math">
+                    <m:r>
+                      <a:rPr lang="en-IN" i="1">
+                        <a:latin typeface="Cambria Math" panose="02040503050406030204" pitchFamily="18" charset="0"/>
+                      </a:rPr>
+                      <m:t>𝑂</m:t>
+                    </m:r>
+                    <m:d>
+                      <m:dPr>
+                        <m:ctrlPr>
+                          <a:rPr lang="en-IN" i="1">
+                            <a:latin typeface="Cambria Math" panose="02040503050406030204" pitchFamily="18" charset="0"/>
+                          </a:rPr>
+                        </m:ctrlPr>
+                      </m:dPr>
+                      <m:e>
+                        <m:sSup>
+                          <m:sSupPr>
+                            <m:ctrlPr>
+                              <a:rPr lang="en-IN" i="1">
+                                <a:latin typeface="Cambria Math" panose="02040503050406030204" pitchFamily="18" charset="0"/>
+                              </a:rPr>
+                            </m:ctrlPr>
+                          </m:sSupPr>
+                          <m:e>
+                            <m:r>
+                              <a:rPr lang="en-IN" i="1">
+                                <a:latin typeface="Cambria Math" panose="02040503050406030204" pitchFamily="18" charset="0"/>
+                              </a:rPr>
+                              <m:t>𝑛</m:t>
+                            </m:r>
+                          </m:e>
+                          <m:sup>
+                            <m:r>
+                              <a:rPr lang="en-IN">
+                                <a:latin typeface="Cambria Math" panose="02040503050406030204" pitchFamily="18" charset="0"/>
+                              </a:rPr>
+                              <m:t>1.585</m:t>
+                            </m:r>
+                          </m:sup>
+                        </m:sSup>
+                      </m:e>
+                    </m:d>
+                  </m:oMath>
+                </a14:m>
+                <a:r>
+                  <a:rPr lang="en-IN" sz="1200" dirty="0"/>
+                  <a:t>, which is better than </a:t>
+                </a:r>
+                <a14:m>
+                  <m:oMath xmlns:m="http://schemas.openxmlformats.org/officeDocument/2006/math">
+                    <m:r>
+                      <a:rPr lang="en-IN" i="1">
+                        <a:latin typeface="Cambria Math" panose="02040503050406030204" pitchFamily="18" charset="0"/>
+                      </a:rPr>
+                      <m:t>𝑂</m:t>
+                    </m:r>
+                    <m:d>
+                      <m:dPr>
+                        <m:ctrlPr>
+                          <a:rPr lang="en-IN" i="1">
+                            <a:latin typeface="Cambria Math" panose="02040503050406030204" pitchFamily="18" charset="0"/>
+                          </a:rPr>
+                        </m:ctrlPr>
+                      </m:dPr>
+                      <m:e>
+                        <m:sSup>
+                          <m:sSupPr>
+                            <m:ctrlPr>
+                              <a:rPr lang="en-IN" i="1">
+                                <a:latin typeface="Cambria Math" panose="02040503050406030204" pitchFamily="18" charset="0"/>
+                              </a:rPr>
+                            </m:ctrlPr>
+                          </m:sSupPr>
+                          <m:e>
+                            <m:r>
+                              <a:rPr lang="en-IN" i="1">
+                                <a:latin typeface="Cambria Math" panose="02040503050406030204" pitchFamily="18" charset="0"/>
+                              </a:rPr>
+                              <m:t>𝑛</m:t>
+                            </m:r>
+                          </m:e>
+                          <m:sup>
+                            <m:r>
+                              <a:rPr lang="en-IN">
+                                <a:latin typeface="Cambria Math" panose="02040503050406030204" pitchFamily="18" charset="0"/>
+                              </a:rPr>
+                              <m:t>2</m:t>
+                            </m:r>
+                          </m:sup>
+                        </m:sSup>
+                      </m:e>
+                    </m:d>
+                  </m:oMath>
+                </a14:m>
+                <a:r>
+                  <a:rPr lang="en-IN" sz="1200" dirty="0"/>
+                  <a:t>.</a:t>
+                </a:r>
+                <a:endParaRPr sz="1125" b="0" i="0" u="none" dirty="0">
+                  <a:solidFill>
+                    <a:srgbClr val="475569"/>
+                  </a:solidFill>
+                  <a:latin typeface="Inter"/>
+                </a:endParaRPr>
+              </a:p>
+            </p:txBody>
+          </p:sp>
+        </mc:Choice>
+        <mc:Fallback xmlns="">
+          <p:sp>
+            <p:nvSpPr>
+              <p:cNvPr id="14" name="TextBox 13"/>
+              <p:cNvSpPr txBox="1">
+                <a:spLocks noRot="1" noChangeAspect="1" noMove="1" noResize="1" noEditPoints="1" noAdjustHandles="1" noChangeArrowheads="1" noChangeShapeType="1" noTextEdit="1"/>
+              </p:cNvSpPr>
+              <p:nvPr/>
+            </p:nvSpPr>
+            <p:spPr>
+              <a:xfrm>
+                <a:off x="962025" y="2238375"/>
+                <a:ext cx="4762500" cy="625299"/>
+              </a:xfrm>
+              <a:prstGeom prst="rect">
+                <a:avLst/>
+              </a:prstGeom>
+              <a:blipFill>
+                <a:blip r:embed="rId7"/>
+                <a:stretch>
+                  <a:fillRect l="-2049" r="-1024" b="-9709"/>
+                </a:stretch>
+              </a:blipFill>
+            </p:spPr>
+            <p:txBody>
+              <a:bodyPr/>
+              <a:lstStyle/>
+              <a:p>
+                <a:r>
+                  <a:rPr lang="en-IN">
+                    <a:noFill/>
+                  </a:rPr>
+                  <a:t> </a:t>
+                </a:r>
+              </a:p>
+            </p:txBody>
+          </p:sp>
+        </mc:Fallback>
+      </mc:AlternateContent>
+      <p:sp>
+        <p:nvSpPr>
+          <p:cNvPr id="15" name="TextBox 14"/>
+          <p:cNvSpPr txBox="1"/>
+          <p:nvPr/>
+        </p:nvSpPr>
+        <p:spPr>
+          <a:xfrm>
+            <a:off x="962025" y="2919412"/>
+            <a:ext cx="4762500" cy="184666"/>
+          </a:xfrm>
+          <a:prstGeom prst="rect">
+            <a:avLst/>
+          </a:prstGeom>
+          <a:noFill/>
+        </p:spPr>
+        <p:txBody>
+          <a:bodyPr wrap="square" lIns="0" tIns="0" rIns="0" bIns="0" anchor="t">
+            <a:spAutoFit/>
+          </a:bodyPr>
+          <a:lstStyle/>
+          <a:p>
+            <a:r>
+              <a:rPr lang="en-IN" sz="1200" b="1" dirty="0"/>
+              <a:t>Scalable:</a:t>
+            </a:r>
+            <a:r>
+              <a:rPr lang="en-IN" sz="1200" dirty="0"/>
+              <a:t> It performs efficiently as the number of digits increases.</a:t>
+            </a:r>
+            <a:r>
+              <a:rPr sz="1125" b="0" i="0" u="none" dirty="0">
                 <a:solidFill>
                   <a:srgbClr val="475569"/>
                 </a:solidFill>
                 <a:latin typeface="Inter"/>
               </a:rPr>
-              <a:t> Reduces algorithmic complexity from O(n^2) to O(n^1.585).</a:t>
-            </a:r>
-          </a:p>
-        </p:txBody>
-      </p:sp>
-      <p:sp>
-        <p:nvSpPr>
-          <p:cNvPr id="14" name="TextBox 13"/>
-          <p:cNvSpPr txBox="1"/>
-          <p:nvPr/>
-        </p:nvSpPr>
-        <p:spPr>
-          <a:xfrm>
-            <a:off x="962025" y="2238375"/>
-            <a:ext cx="4762500" cy="428625"/>
-          </a:xfrm>
-          <a:prstGeom prst="rect">
-            <a:avLst/>
-          </a:prstGeom>
-          <a:noFill/>
-        </p:spPr>
-        <p:txBody>
-          <a:bodyPr wrap="square" lIns="0" tIns="0" rIns="0" bIns="0" anchor="t">
-            <a:spAutoFit/>
-          </a:bodyPr>
-          <a:lstStyle/>
-          <a:p>
-            <a:pPr algn="l">
-              <a:lnSpc>
-                <a:spcPts val="1685"/>
-              </a:lnSpc>
-            </a:pPr>
-            <a:r>
-              <a:rPr sz="1125" b="1" i="0" u="none">
-                <a:solidFill>
-                  <a:srgbClr val="475569"/>
-                </a:solidFill>
-                <a:latin typeface="Inter"/>
-              </a:rPr>
-              <a:t>Fewer Multiplications:</a:t>
-            </a:r>
-            <a:r>
-              <a:rPr sz="1125" b="0" i="0" u="none">
-                <a:solidFill>
-                  <a:srgbClr val="475569"/>
-                </a:solidFill>
-                <a:latin typeface="Inter"/>
-              </a:rPr>
-              <a:t> Replaces expensive digit multiplications with cheaper additions/subtractions.</a:t>
-            </a:r>
-          </a:p>
-        </p:txBody>
-      </p:sp>
-      <p:sp>
-        <p:nvSpPr>
-          <p:cNvPr id="15" name="TextBox 14"/>
-          <p:cNvSpPr txBox="1"/>
-          <p:nvPr/>
-        </p:nvSpPr>
-        <p:spPr>
-          <a:xfrm>
-            <a:off x="962025" y="2743200"/>
-            <a:ext cx="4762500" cy="428625"/>
-          </a:xfrm>
-          <a:prstGeom prst="rect">
-            <a:avLst/>
-          </a:prstGeom>
-          <a:noFill/>
-        </p:spPr>
-        <p:txBody>
-          <a:bodyPr wrap="square" lIns="0" tIns="0" rIns="0" bIns="0" anchor="t">
-            <a:spAutoFit/>
-          </a:bodyPr>
-          <a:lstStyle/>
-          <a:p>
-            <a:pPr algn="l">
-              <a:lnSpc>
-                <a:spcPts val="1685"/>
-              </a:lnSpc>
-            </a:pPr>
-            <a:r>
-              <a:rPr sz="1125" b="1" i="0" u="none">
-                <a:solidFill>
-                  <a:srgbClr val="475569"/>
-                </a:solidFill>
-                <a:latin typeface="Inter"/>
-              </a:rPr>
-              <a:t>Scalability:</a:t>
-            </a:r>
-            <a:r>
-              <a:rPr sz="1125" b="0" i="0" u="none">
-                <a:solidFill>
-                  <a:srgbClr val="475569"/>
-                </a:solidFill>
-                <a:latin typeface="Inter"/>
-              </a:rPr>
-              <a:t> Performs exceptionally well on multi-thousand-digit numbers.</a:t>
-            </a:r>
-          </a:p>
-        </p:txBody>
-      </p:sp>
-      <p:sp>
-        <p:nvSpPr>
-          <p:cNvPr id="16" name="TextBox 15"/>
-          <p:cNvSpPr txBox="1"/>
-          <p:nvPr/>
-        </p:nvSpPr>
-        <p:spPr>
-          <a:xfrm>
-            <a:off x="962025" y="3248025"/>
-            <a:ext cx="4762500" cy="428625"/>
-          </a:xfrm>
-          <a:prstGeom prst="rect">
-            <a:avLst/>
-          </a:prstGeom>
-          <a:noFill/>
-        </p:spPr>
-        <p:txBody>
-          <a:bodyPr wrap="square" lIns="0" tIns="0" rIns="0" bIns="0" anchor="t">
-            <a:spAutoFit/>
-          </a:bodyPr>
-          <a:lstStyle/>
-          <a:p>
-            <a:pPr algn="l">
-              <a:lnSpc>
-                <a:spcPts val="1685"/>
-              </a:lnSpc>
-            </a:pPr>
-            <a:r>
-              <a:rPr sz="1125" b="1" i="0" u="none">
-                <a:solidFill>
-                  <a:srgbClr val="475569"/>
-                </a:solidFill>
-                <a:latin typeface="Inter"/>
-              </a:rPr>
-              <a:t>Foundational Design:</a:t>
-            </a:r>
-            <a:r>
-              <a:rPr sz="1125" b="0" i="0" u="none">
-                <a:solidFill>
-                  <a:srgbClr val="475569"/>
-                </a:solidFill>
-                <a:latin typeface="Inter"/>
-              </a:rPr>
-              <a:t> Paved the way for Toom-Cook and FFT-based multiplication algorithms.</a:t>
+              <a:t>.</a:t>
             </a:r>
           </a:p>
         </p:txBody>
@@ -3834,7 +3912,7 @@
           <p:nvPr/>
         </p:nvPicPr>
         <p:blipFill>
-          <a:blip r:embed="rId7"/>
+          <a:blip r:embed="rId8"/>
           <a:stretch>
             <a:fillRect/>
           </a:stretch>
@@ -3858,7 +3936,7 @@
         <p:spPr>
           <a:xfrm>
             <a:off x="6657975" y="1733550"/>
-            <a:ext cx="4762500" cy="428625"/>
+            <a:ext cx="4762500" cy="369332"/>
           </a:xfrm>
           <a:prstGeom prst="rect">
             <a:avLst/>
@@ -3871,29 +3949,20 @@
           </a:bodyPr>
           <a:lstStyle/>
           <a:p>
-            <a:pPr algn="l">
-              <a:lnSpc>
-                <a:spcPts val="1685"/>
-              </a:lnSpc>
-            </a:pPr>
-            <a:r>
-              <a:rPr sz="1125" b="1" i="0" u="none">
-                <a:solidFill>
-                  <a:srgbClr val="475569"/>
-                </a:solidFill>
-                <a:latin typeface="Inter"/>
-              </a:rPr>
-              <a:t>Implementation Complexity:</a:t>
-            </a:r>
-            <a:r>
-              <a:rPr sz="1125" b="0" i="0" u="none">
-                <a:solidFill>
-                  <a:srgbClr val="475569"/>
-                </a:solidFill>
-                <a:latin typeface="Inter"/>
-              </a:rPr>
-              <a:t> Harder to code correctly and optimize compared to standard grade-school loops.</a:t>
-            </a:r>
+            <a:r>
+              <a:rPr lang="en-IN" sz="1200" b="1" dirty="0"/>
+              <a:t>Complex implementation:</a:t>
+            </a:r>
+            <a:r>
+              <a:rPr lang="en-IN" sz="1200" dirty="0"/>
+              <a:t> Karatsuba is more difficult to implement than traditional multiplication.</a:t>
+            </a:r>
+            <a:endParaRPr sz="1125" b="0" i="0" u="none" dirty="0">
+              <a:solidFill>
+                <a:srgbClr val="475569"/>
+              </a:solidFill>
+              <a:latin typeface="Inter"/>
+            </a:endParaRPr>
           </a:p>
         </p:txBody>
       </p:sp>
@@ -3906,7 +3975,7 @@
         <p:spPr>
           <a:xfrm>
             <a:off x="6657975" y="2238375"/>
-            <a:ext cx="4762500" cy="431800"/>
+            <a:ext cx="4762500" cy="369332"/>
           </a:xfrm>
           <a:prstGeom prst="rect">
             <a:avLst/>
@@ -3919,29 +3988,20 @@
           </a:bodyPr>
           <a:lstStyle/>
           <a:p>
-            <a:pPr algn="l">
-              <a:lnSpc>
-                <a:spcPts val="1685"/>
-              </a:lnSpc>
-            </a:pPr>
-            <a:r>
-              <a:rPr sz="1125" b="1" i="0" u="none">
-                <a:solidFill>
-                  <a:srgbClr val="475569"/>
-                </a:solidFill>
-                <a:latin typeface="Inter"/>
-              </a:rPr>
-              <a:t>Extra Memory Footprint:</a:t>
-            </a:r>
-            <a:r>
-              <a:rPr sz="1125" b="0" i="0" u="none">
-                <a:solidFill>
-                  <a:srgbClr val="475569"/>
-                </a:solidFill>
-                <a:latin typeface="Inter"/>
-              </a:rPr>
-              <a:t> Requires auxiliary space O(n) for call stacks and intermediate arrays.</a:t>
-            </a:r>
+            <a:r>
+              <a:rPr lang="en-IN" sz="1200" b="1" dirty="0"/>
+              <a:t>Extra memory:</a:t>
+            </a:r>
+            <a:r>
+              <a:rPr lang="en-IN" sz="1200" dirty="0"/>
+              <a:t> It requires additional memory for recursive calls and intermediate calculations.</a:t>
+            </a:r>
+            <a:endParaRPr sz="1125" b="0" i="0" u="none" dirty="0">
+              <a:solidFill>
+                <a:srgbClr val="475569"/>
+              </a:solidFill>
+              <a:latin typeface="Inter"/>
+            </a:endParaRPr>
           </a:p>
         </p:txBody>
       </p:sp>
@@ -3954,7 +4014,7 @@
         <p:spPr>
           <a:xfrm>
             <a:off x="6657975" y="2743200"/>
-            <a:ext cx="4762500" cy="428625"/>
+            <a:ext cx="4762500" cy="369332"/>
           </a:xfrm>
           <a:prstGeom prst="rect">
             <a:avLst/>
@@ -3967,29 +4027,20 @@
           </a:bodyPr>
           <a:lstStyle/>
           <a:p>
-            <a:pPr algn="l">
-              <a:lnSpc>
-                <a:spcPts val="1685"/>
-              </a:lnSpc>
-            </a:pPr>
-            <a:r>
-              <a:rPr sz="1125" b="1" i="0" u="none">
-                <a:solidFill>
-                  <a:srgbClr val="475569"/>
-                </a:solidFill>
-                <a:latin typeface="Inter"/>
-              </a:rPr>
-              <a:t>Higher Constant Factors:</a:t>
-            </a:r>
-            <a:r>
-              <a:rPr sz="1125" b="0" i="0" u="none">
-                <a:solidFill>
-                  <a:srgbClr val="475569"/>
-                </a:solidFill>
-                <a:latin typeface="Inter"/>
-              </a:rPr>
-              <a:t> Extra additions and bit-shifts add overhead for small numbers.</a:t>
-            </a:r>
+            <a:r>
+              <a:rPr lang="en-IN" sz="1200" b="1" dirty="0"/>
+              <a:t>Not suitable for small numbers:</a:t>
+            </a:r>
+            <a:r>
+              <a:rPr lang="en-IN" sz="1200" dirty="0"/>
+              <a:t> For small numbers, the overhead of recursion can make it slower.</a:t>
+            </a:r>
+            <a:endParaRPr sz="1125" b="0" i="0" u="none" dirty="0">
+              <a:solidFill>
+                <a:srgbClr val="475569"/>
+              </a:solidFill>
+              <a:latin typeface="Inter"/>
+            </a:endParaRPr>
           </a:p>
         </p:txBody>
       </p:sp>
@@ -4079,7 +4130,7 @@
         </p:nvSpPr>
         <p:spPr>
           <a:xfrm>
-            <a:off x="771525" y="2724150"/>
+            <a:off x="804862" y="2867025"/>
             <a:ext cx="104775" cy="285750"/>
           </a:xfrm>
           <a:prstGeom prst="rect">
@@ -4099,46 +4150,7 @@
               </a:lnSpc>
             </a:pPr>
             <a:r>
-              <a:rPr sz="1500" b="0" i="0" u="none">
-                <a:solidFill>
-                  <a:srgbClr val="6366F1"/>
-                </a:solidFill>
-                <a:latin typeface="Inter"/>
-              </a:rPr>
-              <a:t>•</a:t>
-            </a:r>
-          </a:p>
-        </p:txBody>
-      </p:sp>
-      <p:sp>
-        <p:nvSpPr>
-          <p:cNvPr id="24" name="TextBox 23"/>
-          <p:cNvSpPr txBox="1"/>
-          <p:nvPr/>
-        </p:nvSpPr>
-        <p:spPr>
-          <a:xfrm>
-            <a:off x="771525" y="3228975"/>
-            <a:ext cx="104775" cy="285750"/>
-          </a:xfrm>
-          <a:prstGeom prst="rect">
-            <a:avLst/>
-          </a:prstGeom>
-          <a:noFill/>
-        </p:spPr>
-        <p:txBody>
-          <a:bodyPr wrap="square" lIns="0" tIns="0" rIns="0" bIns="0" anchor="t">
-            <a:spAutoFit/>
-          </a:bodyPr>
-          <a:lstStyle/>
-          <a:p>
-            <a:pPr algn="l">
-              <a:lnSpc>
-                <a:spcPts val="2250"/>
-              </a:lnSpc>
-            </a:pPr>
-            <a:r>
-              <a:rPr sz="1500" b="0" i="0" u="none">
+              <a:rPr sz="1500" b="0" i="0" u="none" dirty="0">
                 <a:solidFill>
                   <a:srgbClr val="6366F1"/>
                 </a:solidFill>
@@ -4277,14 +4289,6 @@
 <file path=ppt/slides/slide11.xml><?xml version="1.0" encoding="utf-8"?>
 <p:sld xmlns:a="http://schemas.openxmlformats.org/drawingml/2006/main" xmlns:r="http://schemas.openxmlformats.org/officeDocument/2006/relationships" xmlns:p="http://schemas.openxmlformats.org/presentationml/2006/main">
   <p:cSld>
-    <p:bg>
-      <p:bgPr>
-        <a:solidFill>
-          <a:srgbClr val="FFFFFF"/>
-        </a:solidFill>
-        <a:effectLst/>
-      </p:bgPr>
-    </p:bg>
     <p:spTree>
       <p:nvGrpSpPr>
         <p:cNvPr id="1" name=""/>
@@ -4315,17 +4319,157 @@
         </p:blipFill>
         <p:spPr>
           <a:xfrm>
-            <a:off x="533400" y="6419850"/>
-            <a:ext cx="11125200" cy="247650"/>
+            <a:off x="6334125" y="1666875"/>
+            <a:ext cx="5286375" cy="3810000"/>
           </a:xfrm>
           <a:prstGeom prst="rect">
             <a:avLst/>
           </a:prstGeom>
         </p:spPr>
       </p:pic>
+      <p:sp>
+        <p:nvSpPr>
+          <p:cNvPr id="3" name="TextBox 2"/>
+          <p:cNvSpPr txBox="1"/>
+          <p:nvPr/>
+        </p:nvSpPr>
+        <p:spPr>
+          <a:xfrm>
+            <a:off x="857250" y="1666875"/>
+            <a:ext cx="5000625" cy="984885"/>
+          </a:xfrm>
+          <a:prstGeom prst="rect">
+            <a:avLst/>
+          </a:prstGeom>
+          <a:noFill/>
+        </p:spPr>
+        <p:txBody>
+          <a:bodyPr wrap="square" lIns="0" tIns="0" rIns="0" bIns="0" anchor="t">
+            <a:spAutoFit/>
+          </a:bodyPr>
+          <a:lstStyle/>
+          <a:p>
+            <a:r>
+              <a:rPr lang="en-IN" sz="1600" b="1" dirty="0"/>
+              <a:t>Public-Key Cryptography: </a:t>
+            </a:r>
+            <a:r>
+              <a:rPr lang="en-IN" sz="1600" dirty="0"/>
+              <a:t> Systems like RSA rely on performing arithmetic operations involving very large prime numbers, often hundreds or thousands of digits long, to help secure communications.</a:t>
+            </a:r>
+            <a:endParaRPr sz="1500" b="0" i="0" u="none" dirty="0">
+              <a:solidFill>
+                <a:srgbClr val="334155"/>
+              </a:solidFill>
+              <a:latin typeface="DM Sans"/>
+            </a:endParaRPr>
+          </a:p>
+        </p:txBody>
+      </p:sp>
+      <p:sp>
+        <p:nvSpPr>
+          <p:cNvPr id="5" name="TextBox 4"/>
+          <p:cNvSpPr txBox="1"/>
+          <p:nvPr/>
+        </p:nvSpPr>
+        <p:spPr>
+          <a:xfrm>
+            <a:off x="857249" y="3182702"/>
+            <a:ext cx="5000625" cy="738664"/>
+          </a:xfrm>
+          <a:prstGeom prst="rect">
+            <a:avLst/>
+          </a:prstGeom>
+          <a:noFill/>
+        </p:spPr>
+        <p:txBody>
+          <a:bodyPr wrap="square" lIns="0" tIns="0" rIns="0" bIns="0" anchor="t">
+            <a:spAutoFit/>
+          </a:bodyPr>
+          <a:lstStyle/>
+          <a:p>
+            <a:r>
+              <a:rPr lang="en-IN" sz="1600" b="1" dirty="0"/>
+              <a:t>Big Integer Calculations</a:t>
+            </a:r>
+            <a:r>
+              <a:rPr sz="1500" b="1" i="0" u="none" dirty="0">
+                <a:solidFill>
+                  <a:srgbClr val="334155"/>
+                </a:solidFill>
+                <a:latin typeface="DM Sans"/>
+              </a:rPr>
+              <a:t>: </a:t>
+            </a:r>
+            <a:r>
+              <a:rPr lang="en-IN" sz="1600" dirty="0"/>
+              <a:t>Programming languages and libraries sometimes need to work with numbers that are much larger than normal integer limits.</a:t>
+            </a:r>
+            <a:endParaRPr sz="1500" i="0" u="none" dirty="0">
+              <a:solidFill>
+                <a:srgbClr val="334155"/>
+              </a:solidFill>
+              <a:latin typeface="DM Sans"/>
+            </a:endParaRPr>
+          </a:p>
+        </p:txBody>
+      </p:sp>
+      <p:sp>
+        <p:nvSpPr>
+          <p:cNvPr id="6" name="TextBox 5"/>
+          <p:cNvSpPr txBox="1"/>
+          <p:nvPr/>
+        </p:nvSpPr>
+        <p:spPr>
+          <a:xfrm>
+            <a:off x="857248" y="4448879"/>
+            <a:ext cx="5000625" cy="738664"/>
+          </a:xfrm>
+          <a:prstGeom prst="rect">
+            <a:avLst/>
+          </a:prstGeom>
+          <a:noFill/>
+        </p:spPr>
+        <p:txBody>
+          <a:bodyPr wrap="square" lIns="0" tIns="0" rIns="0" bIns="0" anchor="t">
+            <a:spAutoFit/>
+          </a:bodyPr>
+          <a:lstStyle/>
+          <a:p>
+            <a:r>
+              <a:rPr sz="1500" b="1" i="0" u="none" dirty="0">
+                <a:solidFill>
+                  <a:srgbClr val="334155"/>
+                </a:solidFill>
+                <a:latin typeface="DM Sans"/>
+              </a:rPr>
+              <a:t>Scientific Research:</a:t>
+            </a:r>
+            <a:r>
+              <a:rPr sz="1500" b="0" i="0" u="none" dirty="0">
+                <a:solidFill>
+                  <a:srgbClr val="334155"/>
+                </a:solidFill>
+                <a:latin typeface="DM Sans"/>
+              </a:rPr>
+              <a:t> </a:t>
+            </a:r>
+            <a:r>
+              <a:rPr lang="en-IN" sz="1600" dirty="0"/>
+              <a:t>Scientific research sometimes requires calculations with numbers containing thousands or millions of digits.</a:t>
+            </a:r>
+            <a:endParaRPr sz="1500" i="0" u="none" dirty="0">
+              <a:solidFill>
+                <a:srgbClr val="334155"/>
+              </a:solidFill>
+              <a:latin typeface="DM Sans"/>
+            </a:endParaRPr>
+          </a:p>
+        </p:txBody>
+      </p:sp>
       <p:pic>
         <p:nvPicPr>
-          <p:cNvPr id="3" name="Picture 2" descr="image.png"/>
+          <p:cNvPr id="7" name="Picture 6" descr="image.png"/>
           <p:cNvPicPr>
             <a:picLocks noChangeAspect="1"/>
           </p:cNvPicPr>
@@ -4339,8 +4483,8 @@
         </p:blipFill>
         <p:spPr>
           <a:xfrm>
-            <a:off x="533400" y="1162050"/>
-            <a:ext cx="11125200" cy="2803326"/>
+            <a:off x="6372225" y="1704975"/>
+            <a:ext cx="5210175" cy="3733800"/>
           </a:xfrm>
           <a:prstGeom prst="rect">
             <a:avLst/>
@@ -4349,87 +4493,124 @@
       </p:pic>
       <p:sp>
         <p:nvSpPr>
-          <p:cNvPr id="4" name="TextBox 3"/>
-          <p:cNvSpPr txBox="1"/>
-          <p:nvPr/>
-        </p:nvSpPr>
-        <p:spPr>
-          <a:xfrm>
-            <a:off x="533400" y="419100"/>
-            <a:ext cx="11658600" cy="400050"/>
-          </a:xfrm>
-          <a:prstGeom prst="rect">
-            <a:avLst/>
-          </a:prstGeom>
-          <a:noFill/>
-        </p:spPr>
-        <p:txBody>
-          <a:bodyPr wrap="square" lIns="0" tIns="0" rIns="0" bIns="0" anchor="ctr">
-            <a:spAutoFit/>
-          </a:bodyPr>
-          <a:lstStyle/>
-          <a:p>
-            <a:pPr algn="l"/>
-            <a:r>
-              <a:rPr sz="2400" b="1" i="0" u="none">
-                <a:solidFill>
-                  <a:srgbClr val="0F172A"/>
-                </a:solidFill>
-                <a:latin typeface="Plus Jakarta Sans"/>
-              </a:rPr>
-              <a:t>11. Integer Multiplication Landscape</a:t>
-            </a:r>
-          </a:p>
-        </p:txBody>
-      </p:sp>
-      <p:sp>
-        <p:nvSpPr>
-          <p:cNvPr id="5" name="Rectangle 4"/>
-          <p:cNvSpPr/>
-          <p:nvPr/>
-        </p:nvSpPr>
-        <p:spPr>
-          <a:xfrm>
-            <a:off x="533400" y="914400"/>
-            <a:ext cx="11125200" cy="19050"/>
-          </a:xfrm>
-          <a:prstGeom prst="rect">
-            <a:avLst/>
-          </a:prstGeom>
-          <a:solidFill>
-            <a:srgbClr val="F1F5F9"/>
-          </a:solidFill>
-          <a:ln>
-            <a:noFill/>
-          </a:ln>
-          <a:effectLst/>
-        </p:spPr>
-        <p:style>
-          <a:lnRef idx="1">
-            <a:schemeClr val="accent1"/>
-          </a:lnRef>
-          <a:fillRef idx="3">
-            <a:schemeClr val="accent1"/>
-          </a:fillRef>
-          <a:effectRef idx="2">
-            <a:schemeClr val="accent1"/>
-          </a:effectRef>
-          <a:fontRef idx="minor">
-            <a:schemeClr val="lt1"/>
-          </a:fontRef>
-        </p:style>
-        <p:txBody>
-          <a:bodyPr rtlCol="0" anchor="ctr"/>
-          <a:lstStyle/>
-          <a:p>
-            <a:pPr algn="ctr"/>
-            <a:endParaRPr/>
+          <p:cNvPr id="8" name="TextBox 7"/>
+          <p:cNvSpPr txBox="1"/>
+          <p:nvPr/>
+        </p:nvSpPr>
+        <p:spPr>
+          <a:xfrm>
+            <a:off x="571500" y="1685925"/>
+            <a:ext cx="76200" cy="200025"/>
+          </a:xfrm>
+          <a:prstGeom prst="rect">
+            <a:avLst/>
+          </a:prstGeom>
+          <a:noFill/>
+        </p:spPr>
+        <p:txBody>
+          <a:bodyPr wrap="square" lIns="0" tIns="0" rIns="0" bIns="0" anchor="t">
+            <a:spAutoFit/>
+          </a:bodyPr>
+          <a:lstStyle/>
+          <a:p>
+            <a:pPr algn="l">
+              <a:lnSpc>
+                <a:spcPts val="1575"/>
+              </a:lnSpc>
+            </a:pPr>
+            <a:r>
+              <a:rPr sz="1050" b="0" i="0" u="none">
+                <a:solidFill>
+                  <a:srgbClr val="11CAA0"/>
+                </a:solidFill>
+                <a:latin typeface="DM Sans"/>
+              </a:rPr>
+              <a:t>■</a:t>
+            </a:r>
+          </a:p>
+        </p:txBody>
+      </p:sp>
+      <p:sp>
+        <p:nvSpPr>
+          <p:cNvPr id="10" name="TextBox 9"/>
+          <p:cNvSpPr txBox="1"/>
+          <p:nvPr/>
+        </p:nvSpPr>
+        <p:spPr>
+          <a:xfrm>
+            <a:off x="542924" y="3228975"/>
+            <a:ext cx="76200" cy="200025"/>
+          </a:xfrm>
+          <a:prstGeom prst="rect">
+            <a:avLst/>
+          </a:prstGeom>
+          <a:noFill/>
+        </p:spPr>
+        <p:txBody>
+          <a:bodyPr wrap="square" lIns="0" tIns="0" rIns="0" bIns="0" anchor="t">
+            <a:spAutoFit/>
+          </a:bodyPr>
+          <a:lstStyle/>
+          <a:p>
+            <a:pPr algn="l">
+              <a:lnSpc>
+                <a:spcPts val="1575"/>
+              </a:lnSpc>
+            </a:pPr>
+            <a:r>
+              <a:rPr sz="1050" b="0" i="0" u="none" dirty="0">
+                <a:solidFill>
+                  <a:srgbClr val="11CAA0"/>
+                </a:solidFill>
+                <a:latin typeface="DM Sans"/>
+              </a:rPr>
+              <a:t>■</a:t>
+            </a:r>
+          </a:p>
+        </p:txBody>
+      </p:sp>
+      <p:sp>
+        <p:nvSpPr>
+          <p:cNvPr id="11" name="TextBox 10"/>
+          <p:cNvSpPr txBox="1"/>
+          <p:nvPr/>
+        </p:nvSpPr>
+        <p:spPr>
+          <a:xfrm>
+            <a:off x="600689" y="4448879"/>
+            <a:ext cx="76200" cy="200025"/>
+          </a:xfrm>
+          <a:prstGeom prst="rect">
+            <a:avLst/>
+          </a:prstGeom>
+          <a:noFill/>
+        </p:spPr>
+        <p:txBody>
+          <a:bodyPr wrap="square" lIns="0" tIns="0" rIns="0" bIns="0" anchor="t">
+            <a:spAutoFit/>
+          </a:bodyPr>
+          <a:lstStyle/>
+          <a:p>
+            <a:pPr algn="l">
+              <a:lnSpc>
+                <a:spcPts val="1575"/>
+              </a:lnSpc>
+            </a:pPr>
+            <a:r>
+              <a:rPr sz="1050" b="0" i="0" u="none" dirty="0">
+                <a:solidFill>
+                  <a:srgbClr val="11CAA0"/>
+                </a:solidFill>
+                <a:latin typeface="DM Sans"/>
+              </a:rPr>
+              <a:t>■</a:t>
+            </a:r>
           </a:p>
         </p:txBody>
       </p:sp>
       <p:pic>
         <p:nvPicPr>
-          <p:cNvPr id="6" name="Picture 5" descr="image.png"/>
+          <p:cNvPr id="12" name="Picture 11" descr="image.png"/>
           <p:cNvPicPr>
             <a:picLocks noChangeAspect="1"/>
           </p:cNvPicPr>
@@ -4443,8 +4624,8 @@
         </p:blipFill>
         <p:spPr>
           <a:xfrm>
-            <a:off x="10210800" y="485775"/>
-            <a:ext cx="1447800" cy="247650"/>
+            <a:off x="4143375" y="5495925"/>
+            <a:ext cx="96291" cy="95250"/>
           </a:xfrm>
           <a:prstGeom prst="rect">
             <a:avLst/>
@@ -4453,14 +4634,14 @@
       </p:pic>
       <p:sp>
         <p:nvSpPr>
-          <p:cNvPr id="7" name="TextBox 6"/>
-          <p:cNvSpPr txBox="1"/>
-          <p:nvPr/>
-        </p:nvSpPr>
-        <p:spPr>
-          <a:xfrm>
-            <a:off x="533400" y="6524625"/>
-            <a:ext cx="2019300" cy="142875"/>
+          <p:cNvPr id="14" name="TextBox 13"/>
+          <p:cNvSpPr txBox="1"/>
+          <p:nvPr/>
+        </p:nvSpPr>
+        <p:spPr>
+          <a:xfrm>
+            <a:off x="571500" y="571500"/>
+            <a:ext cx="11601450" cy="571500"/>
           </a:xfrm>
           <a:prstGeom prst="rect">
             <a:avLst/>
@@ -4475,988 +4656,17 @@
           <a:p>
             <a:pPr algn="l"/>
             <a:r>
-              <a:rPr sz="900" b="0" i="0" u="none">
-                <a:solidFill>
-                  <a:srgbClr val="94A3B8"/>
-                </a:solidFill>
-                <a:latin typeface="Inter"/>
-              </a:rPr>
-              <a:t>Karatsuba Multiplication Presentation</a:t>
-            </a:r>
-          </a:p>
-        </p:txBody>
-      </p:sp>
-      <p:sp>
-        <p:nvSpPr>
-          <p:cNvPr id="8" name="TextBox 7"/>
-          <p:cNvSpPr txBox="1"/>
-          <p:nvPr/>
-        </p:nvSpPr>
-        <p:spPr>
-          <a:xfrm>
-            <a:off x="10963275" y="6524625"/>
-            <a:ext cx="695325" cy="142875"/>
-          </a:xfrm>
-          <a:prstGeom prst="rect">
-            <a:avLst/>
-          </a:prstGeom>
-          <a:noFill/>
-        </p:spPr>
-        <p:txBody>
-          <a:bodyPr wrap="square" lIns="0" tIns="0" rIns="0" bIns="0" anchor="t">
-            <a:spAutoFit/>
-          </a:bodyPr>
-          <a:lstStyle/>
-          <a:p>
-            <a:pPr algn="l"/>
-            <a:r>
-              <a:rPr sz="900" b="0" i="0" u="none">
-                <a:solidFill>
-                  <a:srgbClr val="94A3B8"/>
-                </a:solidFill>
-                <a:latin typeface="Inter"/>
-              </a:rPr>
-              <a:t>Slide 12 of 14</a:t>
-            </a:r>
-          </a:p>
-        </p:txBody>
-      </p:sp>
-      <p:graphicFrame>
-        <p:nvGraphicFramePr>
-          <p:cNvPr id="9" name="Table 8"/>
-          <p:cNvGraphicFramePr>
-            <a:graphicFrameLocks noGrp="1"/>
-          </p:cNvGraphicFramePr>
-          <p:nvPr>
-            <p:extLst>
-              <p:ext uri="{D42A27DB-BD31-4B8C-83A1-F6EECF244321}">
-                <p14:modId xmlns:p14="http://schemas.microsoft.com/office/powerpoint/2010/main" val="1966473032"/>
-              </p:ext>
-            </p:extLst>
-          </p:nvPr>
-        </p:nvGraphicFramePr>
-        <p:xfrm>
-          <a:off x="542925" y="1171575"/>
-          <a:ext cx="11106149" cy="2784276"/>
-        </p:xfrm>
-        <a:graphic>
-          <a:graphicData uri="http://schemas.openxmlformats.org/drawingml/2006/table">
-            <a:tbl>
-              <a:tblPr firstRow="1" bandRow="1">
-                <a:tableStyleId>{5C22544A-7EE6-4342-B048-85BDC9FD1C3A}</a:tableStyleId>
-              </a:tblPr>
-              <a:tblGrid>
-                <a:gridCol w="2939504">
-                  <a:extLst>
-                    <a:ext uri="{9D8B030D-6E8A-4147-A177-3AD203B41FA5}">
-                      <a16:colId xmlns:a16="http://schemas.microsoft.com/office/drawing/2014/main" val="20000"/>
-                    </a:ext>
-                  </a:extLst>
-                </a:gridCol>
-                <a:gridCol w="2241798">
-                  <a:extLst>
-                    <a:ext uri="{9D8B030D-6E8A-4147-A177-3AD203B41FA5}">
-                      <a16:colId xmlns:a16="http://schemas.microsoft.com/office/drawing/2014/main" val="20001"/>
-                    </a:ext>
-                  </a:extLst>
-                </a:gridCol>
-                <a:gridCol w="1086594">
-                  <a:extLst>
-                    <a:ext uri="{9D8B030D-6E8A-4147-A177-3AD203B41FA5}">
-                      <a16:colId xmlns:a16="http://schemas.microsoft.com/office/drawing/2014/main" val="20002"/>
-                    </a:ext>
-                  </a:extLst>
-                </a:gridCol>
-                <a:gridCol w="4838253">
-                  <a:extLst>
-                    <a:ext uri="{9D8B030D-6E8A-4147-A177-3AD203B41FA5}">
-                      <a16:colId xmlns:a16="http://schemas.microsoft.com/office/drawing/2014/main" val="20003"/>
-                    </a:ext>
-                  </a:extLst>
-                </a:gridCol>
-              </a:tblGrid>
-              <a:tr h="464046">
-                <a:tc>
-                  <a:txBody>
-                    <a:bodyPr/>
-                    <a:lstStyle/>
-                    <a:p>
-                      <a:pPr algn="l"/>
-                      <a:r>
-                        <a:rPr sz="1050" b="1" i="0" u="none">
-                          <a:solidFill>
-                            <a:srgbClr val="FFFFFF"/>
-                          </a:solidFill>
-                          <a:latin typeface="Plus Jakarta Sans"/>
-                        </a:rPr>
-                        <a:t>Algorithm</a:t>
-                      </a:r>
-                    </a:p>
-                  </a:txBody>
-                  <a:tcPr marL="63500" marR="63500" marT="25400" marB="25400" anchor="ctr">
-                    <a:lnL>
-                      <a:noFill/>
-                    </a:lnL>
-                    <a:lnR>
-                      <a:noFill/>
-                    </a:lnR>
-                    <a:lnT>
-                      <a:noFill/>
-                    </a:lnT>
-                    <a:lnB>
-                      <a:noFill/>
-                    </a:lnB>
-                    <a:noFill/>
-                  </a:tcPr>
-                </a:tc>
-                <a:tc>
-                  <a:txBody>
-                    <a:bodyPr/>
-                    <a:lstStyle/>
-                    <a:p>
-                      <a:pPr algn="l"/>
-                      <a:r>
-                        <a:rPr sz="1050" b="1" i="0" u="none">
-                          <a:solidFill>
-                            <a:srgbClr val="FFFFFF"/>
-                          </a:solidFill>
-                          <a:latin typeface="Plus Jakarta Sans"/>
-                        </a:rPr>
-                        <a:t>Time Complexity</a:t>
-                      </a:r>
-                    </a:p>
-                  </a:txBody>
-                  <a:tcPr marL="63500" marR="63500" marT="25400" marB="25400" anchor="ctr">
-                    <a:lnL>
-                      <a:noFill/>
-                    </a:lnL>
-                    <a:lnR>
-                      <a:noFill/>
-                    </a:lnR>
-                    <a:lnT>
-                      <a:noFill/>
-                    </a:lnT>
-                    <a:lnB>
-                      <a:noFill/>
-                    </a:lnB>
-                    <a:noFill/>
-                  </a:tcPr>
-                </a:tc>
-                <a:tc>
-                  <a:txBody>
-                    <a:bodyPr/>
-                    <a:lstStyle/>
-                    <a:p>
-                      <a:pPr algn="l"/>
-                      <a:r>
-                        <a:rPr sz="1050" b="1" i="0" u="none">
-                          <a:solidFill>
-                            <a:srgbClr val="FFFFFF"/>
-                          </a:solidFill>
-                          <a:latin typeface="Plus Jakarta Sans"/>
-                        </a:rPr>
-                        <a:t>Year</a:t>
-                      </a:r>
-                    </a:p>
-                  </a:txBody>
-                  <a:tcPr marL="63500" marR="63500" marT="25400" marB="25400" anchor="ctr">
-                    <a:lnL>
-                      <a:noFill/>
-                    </a:lnL>
-                    <a:lnR>
-                      <a:noFill/>
-                    </a:lnR>
-                    <a:lnT>
-                      <a:noFill/>
-                    </a:lnT>
-                    <a:lnB>
-                      <a:noFill/>
-                    </a:lnB>
-                    <a:noFill/>
-                  </a:tcPr>
-                </a:tc>
-                <a:tc>
-                  <a:txBody>
-                    <a:bodyPr/>
-                    <a:lstStyle/>
-                    <a:p>
-                      <a:pPr algn="l"/>
-                      <a:r>
-                        <a:rPr sz="1050" b="1" i="0" u="none">
-                          <a:solidFill>
-                            <a:srgbClr val="FFFFFF"/>
-                          </a:solidFill>
-                          <a:latin typeface="Plus Jakarta Sans"/>
-                        </a:rPr>
-                        <a:t>Primary Use Case / Practicality</a:t>
-                      </a:r>
-                    </a:p>
-                  </a:txBody>
-                  <a:tcPr marL="63500" marR="63500" marT="25400" marB="25400" anchor="ctr">
-                    <a:lnL>
-                      <a:noFill/>
-                    </a:lnL>
-                    <a:lnR>
-                      <a:noFill/>
-                    </a:lnR>
-                    <a:lnT>
-                      <a:noFill/>
-                    </a:lnT>
-                    <a:lnB>
-                      <a:noFill/>
-                    </a:lnB>
-                    <a:noFill/>
-                  </a:tcPr>
-                </a:tc>
-                <a:extLst>
-                  <a:ext uri="{0D108BD9-81ED-4DB2-BD59-A6C34878D82A}">
-                    <a16:rowId xmlns:a16="http://schemas.microsoft.com/office/drawing/2014/main" val="10000"/>
-                  </a:ext>
-                </a:extLst>
-              </a:tr>
-              <a:tr h="464046">
-                <a:tc>
-                  <a:txBody>
-                    <a:bodyPr/>
-                    <a:lstStyle/>
-                    <a:p>
-                      <a:pPr algn="l"/>
-                      <a:r>
-                        <a:rPr sz="1050" b="1" i="0" u="none">
-                          <a:solidFill>
-                            <a:srgbClr val="1E293B"/>
-                          </a:solidFill>
-                          <a:latin typeface="Inter"/>
-                        </a:rPr>
-                        <a:t>Grade-School (Classical)</a:t>
-                      </a:r>
-                    </a:p>
-                  </a:txBody>
-                  <a:tcPr marL="63500" marR="63500" marT="25400" marB="25400" anchor="ctr">
-                    <a:lnL>
-                      <a:noFill/>
-                    </a:lnL>
-                    <a:lnR>
-                      <a:noFill/>
-                    </a:lnR>
-                    <a:lnT>
-                      <a:noFill/>
-                    </a:lnT>
-                    <a:lnB>
-                      <a:noFill/>
-                    </a:lnB>
-                    <a:noFill/>
-                  </a:tcPr>
-                </a:tc>
-                <a:tc>
-                  <a:txBody>
-                    <a:bodyPr/>
-                    <a:lstStyle/>
-                    <a:p>
-                      <a:pPr algn="l"/>
-                      <a:r>
-                        <a:rPr sz="1050" b="0" i="0" u="none">
-                          <a:solidFill>
-                            <a:srgbClr val="EF4444"/>
-                          </a:solidFill>
-                          <a:latin typeface="Fira Code"/>
-                        </a:rPr>
-                        <a:t>O(n²)</a:t>
-                      </a:r>
-                    </a:p>
-                  </a:txBody>
-                  <a:tcPr marL="63500" marR="63500" marT="25400" marB="25400" anchor="ctr">
-                    <a:lnL>
-                      <a:noFill/>
-                    </a:lnL>
-                    <a:lnR>
-                      <a:noFill/>
-                    </a:lnR>
-                    <a:lnT>
-                      <a:noFill/>
-                    </a:lnT>
-                    <a:lnB>
-                      <a:noFill/>
-                    </a:lnB>
-                    <a:noFill/>
-                  </a:tcPr>
-                </a:tc>
-                <a:tc>
-                  <a:txBody>
-                    <a:bodyPr/>
-                    <a:lstStyle/>
-                    <a:p>
-                      <a:pPr algn="l"/>
-                      <a:r>
-                        <a:rPr sz="1050" b="0" i="0" u="none">
-                          <a:solidFill>
-                            <a:srgbClr val="64748B"/>
-                          </a:solidFill>
-                          <a:latin typeface="Inter"/>
-                        </a:rPr>
-                        <a:t>Antiquity</a:t>
-                      </a:r>
-                    </a:p>
-                  </a:txBody>
-                  <a:tcPr marL="63500" marR="63500" marT="25400" marB="25400" anchor="ctr">
-                    <a:lnL>
-                      <a:noFill/>
-                    </a:lnL>
-                    <a:lnR>
-                      <a:noFill/>
-                    </a:lnR>
-                    <a:lnT>
-                      <a:noFill/>
-                    </a:lnT>
-                    <a:lnB>
-                      <a:noFill/>
-                    </a:lnB>
-                    <a:noFill/>
-                  </a:tcPr>
-                </a:tc>
-                <a:tc>
-                  <a:txBody>
-                    <a:bodyPr/>
-                    <a:lstStyle/>
-                    <a:p>
-                      <a:pPr algn="l"/>
-                      <a:r>
-                        <a:rPr sz="1050" b="0" i="0" u="none">
-                          <a:solidFill>
-                            <a:srgbClr val="475569"/>
-                          </a:solidFill>
-                          <a:latin typeface="Inter"/>
-                        </a:rPr>
-                        <a:t>Small numbers (&lt; 32–64 bits), hardware ALU</a:t>
-                      </a:r>
-                    </a:p>
-                  </a:txBody>
-                  <a:tcPr marL="63500" marR="63500" marT="25400" marB="25400" anchor="ctr">
-                    <a:lnL>
-                      <a:noFill/>
-                    </a:lnL>
-                    <a:lnR>
-                      <a:noFill/>
-                    </a:lnR>
-                    <a:lnT>
-                      <a:noFill/>
-                    </a:lnT>
-                    <a:lnB>
-                      <a:noFill/>
-                    </a:lnB>
-                    <a:noFill/>
-                  </a:tcPr>
-                </a:tc>
-                <a:extLst>
-                  <a:ext uri="{0D108BD9-81ED-4DB2-BD59-A6C34878D82A}">
-                    <a16:rowId xmlns:a16="http://schemas.microsoft.com/office/drawing/2014/main" val="10001"/>
-                  </a:ext>
-                </a:extLst>
-              </a:tr>
-              <a:tr h="464046">
-                <a:tc>
-                  <a:txBody>
-                    <a:bodyPr/>
-                    <a:lstStyle/>
-                    <a:p>
-                      <a:pPr algn="l"/>
-                      <a:r>
-                        <a:rPr sz="1050" b="1" i="0" u="none">
-                          <a:solidFill>
-                            <a:srgbClr val="15803D"/>
-                          </a:solidFill>
-                          <a:latin typeface="Inter"/>
-                        </a:rPr>
-                        <a:t>Karatsuba Multiplication</a:t>
-                      </a:r>
-                    </a:p>
-                  </a:txBody>
-                  <a:tcPr marL="63500" marR="63500" marT="25400" marB="25400" anchor="ctr">
-                    <a:lnL>
-                      <a:noFill/>
-                    </a:lnL>
-                    <a:lnR>
-                      <a:noFill/>
-                    </a:lnR>
-                    <a:lnT>
-                      <a:noFill/>
-                    </a:lnT>
-                    <a:lnB>
-                      <a:noFill/>
-                    </a:lnB>
-                    <a:solidFill>
-                      <a:srgbClr val="F0FDF4"/>
-                    </a:solidFill>
-                  </a:tcPr>
-                </a:tc>
-                <a:tc>
-                  <a:txBody>
-                    <a:bodyPr/>
-                    <a:lstStyle/>
-                    <a:p>
-                      <a:pPr algn="l"/>
-                      <a:r>
-                        <a:rPr sz="1050" b="1" i="0" u="none" dirty="0">
-                          <a:solidFill>
-                            <a:srgbClr val="16A34A"/>
-                          </a:solidFill>
-                          <a:latin typeface="Fira Code"/>
-                        </a:rPr>
-                        <a:t>O(n</a:t>
-                      </a:r>
-                      <a:r>
-                        <a:rPr lang="en-IN" sz="1050" b="1" i="0" u="none" dirty="0">
-                          <a:solidFill>
-                            <a:srgbClr val="16A34A"/>
-                          </a:solidFill>
-                          <a:latin typeface="Fira Code"/>
-                        </a:rPr>
-                        <a:t>^</a:t>
-                      </a:r>
-                      <a:r>
-                        <a:rPr sz="1050" b="1" i="0" u="none" dirty="0">
-                          <a:solidFill>
-                            <a:srgbClr val="16A34A"/>
-                          </a:solidFill>
-                          <a:latin typeface="Fira Code"/>
-                        </a:rPr>
-                        <a:t>1.585)</a:t>
-                      </a:r>
-                    </a:p>
-                  </a:txBody>
-                  <a:tcPr marL="63500" marR="63500" marT="25400" marB="25400" anchor="ctr">
-                    <a:lnL>
-                      <a:noFill/>
-                    </a:lnL>
-                    <a:lnR>
-                      <a:noFill/>
-                    </a:lnR>
-                    <a:lnT>
-                      <a:noFill/>
-                    </a:lnT>
-                    <a:lnB>
-                      <a:noFill/>
-                    </a:lnB>
-                    <a:solidFill>
-                      <a:srgbClr val="F0FDF4"/>
-                    </a:solidFill>
-                  </a:tcPr>
-                </a:tc>
-                <a:tc>
-                  <a:txBody>
-                    <a:bodyPr/>
-                    <a:lstStyle/>
-                    <a:p>
-                      <a:pPr algn="l"/>
-                      <a:r>
-                        <a:rPr sz="1050" b="0" i="0" u="none">
-                          <a:solidFill>
-                            <a:srgbClr val="15803D"/>
-                          </a:solidFill>
-                          <a:latin typeface="Inter SemiBold"/>
-                        </a:rPr>
-                        <a:t>1960</a:t>
-                      </a:r>
-                    </a:p>
-                  </a:txBody>
-                  <a:tcPr marL="63500" marR="63500" marT="25400" marB="25400" anchor="ctr">
-                    <a:lnL>
-                      <a:noFill/>
-                    </a:lnL>
-                    <a:lnR>
-                      <a:noFill/>
-                    </a:lnR>
-                    <a:lnT>
-                      <a:noFill/>
-                    </a:lnT>
-                    <a:lnB>
-                      <a:noFill/>
-                    </a:lnB>
-                    <a:solidFill>
-                      <a:srgbClr val="F0FDF4"/>
-                    </a:solidFill>
-                  </a:tcPr>
-                </a:tc>
-                <a:tc>
-                  <a:txBody>
-                    <a:bodyPr/>
-                    <a:lstStyle/>
-                    <a:p>
-                      <a:pPr algn="l"/>
-                      <a:r>
-                        <a:rPr sz="1050" b="0" i="0" u="none">
-                          <a:solidFill>
-                            <a:srgbClr val="166534"/>
-                          </a:solidFill>
-                          <a:latin typeface="Inter"/>
-                        </a:rPr>
-                        <a:t>Medium-large numbers (30–300 digits)</a:t>
-                      </a:r>
-                    </a:p>
-                  </a:txBody>
-                  <a:tcPr marL="63500" marR="63500" marT="25400" marB="25400" anchor="ctr">
-                    <a:lnL>
-                      <a:noFill/>
-                    </a:lnL>
-                    <a:lnR>
-                      <a:noFill/>
-                    </a:lnR>
-                    <a:lnT>
-                      <a:noFill/>
-                    </a:lnT>
-                    <a:lnB>
-                      <a:noFill/>
-                    </a:lnB>
-                    <a:solidFill>
-                      <a:srgbClr val="F0FDF4"/>
-                    </a:solidFill>
-                  </a:tcPr>
-                </a:tc>
-                <a:extLst>
-                  <a:ext uri="{0D108BD9-81ED-4DB2-BD59-A6C34878D82A}">
-                    <a16:rowId xmlns:a16="http://schemas.microsoft.com/office/drawing/2014/main" val="10002"/>
-                  </a:ext>
-                </a:extLst>
-              </a:tr>
-              <a:tr h="464046">
-                <a:tc>
-                  <a:txBody>
-                    <a:bodyPr/>
-                    <a:lstStyle/>
-                    <a:p>
-                      <a:pPr algn="l"/>
-                      <a:r>
-                        <a:rPr sz="1050" b="1" i="0" u="none">
-                          <a:solidFill>
-                            <a:srgbClr val="1E293B"/>
-                          </a:solidFill>
-                          <a:latin typeface="Inter"/>
-                        </a:rPr>
-                        <a:t>Toom-Cook (Toom-3)</a:t>
-                      </a:r>
-                    </a:p>
-                  </a:txBody>
-                  <a:tcPr marL="63500" marR="63500" marT="25400" marB="25400" anchor="ctr">
-                    <a:lnL>
-                      <a:noFill/>
-                    </a:lnL>
-                    <a:lnR>
-                      <a:noFill/>
-                    </a:lnR>
-                    <a:lnT>
-                      <a:noFill/>
-                    </a:lnT>
-                    <a:lnB>
-                      <a:noFill/>
-                    </a:lnB>
-                    <a:noFill/>
-                  </a:tcPr>
-                </a:tc>
-                <a:tc>
-                  <a:txBody>
-                    <a:bodyPr/>
-                    <a:lstStyle/>
-                    <a:p>
-                      <a:pPr algn="l"/>
-                      <a:r>
-                        <a:rPr sz="1050" b="0" i="0" u="none" dirty="0">
-                          <a:solidFill>
-                            <a:srgbClr val="2563EB"/>
-                          </a:solidFill>
-                          <a:latin typeface="Fira Code"/>
-                        </a:rPr>
-                        <a:t>O(n</a:t>
-                      </a:r>
-                      <a:r>
-                        <a:rPr lang="en-IN" sz="1050" b="0" i="0" u="none">
-                          <a:solidFill>
-                            <a:srgbClr val="2563EB"/>
-                          </a:solidFill>
-                          <a:latin typeface="Fira Code"/>
-                        </a:rPr>
-                        <a:t>^</a:t>
-                      </a:r>
-                      <a:r>
-                        <a:rPr sz="1050" b="0" i="0" u="none">
-                          <a:solidFill>
-                            <a:srgbClr val="2563EB"/>
-                          </a:solidFill>
-                          <a:latin typeface="Fira Code"/>
-                        </a:rPr>
-                        <a:t>1.465)</a:t>
-                      </a:r>
-                    </a:p>
-                  </a:txBody>
-                  <a:tcPr marL="63500" marR="63500" marT="25400" marB="25400" anchor="ctr">
-                    <a:lnL>
-                      <a:noFill/>
-                    </a:lnL>
-                    <a:lnR>
-                      <a:noFill/>
-                    </a:lnR>
-                    <a:lnT>
-                      <a:noFill/>
-                    </a:lnT>
-                    <a:lnB>
-                      <a:noFill/>
-                    </a:lnB>
-                    <a:noFill/>
-                  </a:tcPr>
-                </a:tc>
-                <a:tc>
-                  <a:txBody>
-                    <a:bodyPr/>
-                    <a:lstStyle/>
-                    <a:p>
-                      <a:pPr algn="l"/>
-                      <a:r>
-                        <a:rPr sz="1050" b="0" i="0" u="none">
-                          <a:solidFill>
-                            <a:srgbClr val="64748B"/>
-                          </a:solidFill>
-                          <a:latin typeface="Inter"/>
-                        </a:rPr>
-                        <a:t>1963</a:t>
-                      </a:r>
-                    </a:p>
-                  </a:txBody>
-                  <a:tcPr marL="63500" marR="63500" marT="25400" marB="25400" anchor="ctr">
-                    <a:lnL>
-                      <a:noFill/>
-                    </a:lnL>
-                    <a:lnR>
-                      <a:noFill/>
-                    </a:lnR>
-                    <a:lnT>
-                      <a:noFill/>
-                    </a:lnT>
-                    <a:lnB>
-                      <a:noFill/>
-                    </a:lnB>
-                    <a:noFill/>
-                  </a:tcPr>
-                </a:tc>
-                <a:tc>
-                  <a:txBody>
-                    <a:bodyPr/>
-                    <a:lstStyle/>
-                    <a:p>
-                      <a:pPr algn="l"/>
-                      <a:r>
-                        <a:rPr sz="1050" b="0" i="0" u="none">
-                          <a:solidFill>
-                            <a:srgbClr val="475569"/>
-                          </a:solidFill>
-                          <a:latin typeface="Inter"/>
-                        </a:rPr>
-                        <a:t>Splits into 3 parts; large integers (300–3000 digits)</a:t>
-                      </a:r>
-                    </a:p>
-                  </a:txBody>
-                  <a:tcPr marL="63500" marR="63500" marT="25400" marB="25400" anchor="ctr">
-                    <a:lnL>
-                      <a:noFill/>
-                    </a:lnL>
-                    <a:lnR>
-                      <a:noFill/>
-                    </a:lnR>
-                    <a:lnT>
-                      <a:noFill/>
-                    </a:lnT>
-                    <a:lnB>
-                      <a:noFill/>
-                    </a:lnB>
-                    <a:noFill/>
-                  </a:tcPr>
-                </a:tc>
-                <a:extLst>
-                  <a:ext uri="{0D108BD9-81ED-4DB2-BD59-A6C34878D82A}">
-                    <a16:rowId xmlns:a16="http://schemas.microsoft.com/office/drawing/2014/main" val="10003"/>
-                  </a:ext>
-                </a:extLst>
-              </a:tr>
-              <a:tr h="464046">
-                <a:tc>
-                  <a:txBody>
-                    <a:bodyPr/>
-                    <a:lstStyle/>
-                    <a:p>
-                      <a:pPr algn="l"/>
-                      <a:r>
-                        <a:rPr sz="1050" b="1" i="0" u="none">
-                          <a:solidFill>
-                            <a:srgbClr val="1E293B"/>
-                          </a:solidFill>
-                          <a:latin typeface="Inter"/>
-                        </a:rPr>
-                        <a:t>Schönhage–Strassen (FFT)</a:t>
-                      </a:r>
-                    </a:p>
-                  </a:txBody>
-                  <a:tcPr marL="63500" marR="63500" marT="25400" marB="25400" anchor="ctr">
-                    <a:lnL>
-                      <a:noFill/>
-                    </a:lnL>
-                    <a:lnR>
-                      <a:noFill/>
-                    </a:lnR>
-                    <a:lnT>
-                      <a:noFill/>
-                    </a:lnT>
-                    <a:lnB>
-                      <a:noFill/>
-                    </a:lnB>
-                    <a:noFill/>
-                  </a:tcPr>
-                </a:tc>
-                <a:tc>
-                  <a:txBody>
-                    <a:bodyPr/>
-                    <a:lstStyle/>
-                    <a:p>
-                      <a:pPr algn="l"/>
-                      <a:r>
-                        <a:rPr sz="1050" b="0" i="0" u="none">
-                          <a:solidFill>
-                            <a:srgbClr val="7C3AED"/>
-                          </a:solidFill>
-                          <a:latin typeface="Fira Code"/>
-                        </a:rPr>
-                        <a:t>O(n log n log log n)</a:t>
-                      </a:r>
-                    </a:p>
-                  </a:txBody>
-                  <a:tcPr marL="63500" marR="63500" marT="25400" marB="25400" anchor="ctr">
-                    <a:lnL>
-                      <a:noFill/>
-                    </a:lnL>
-                    <a:lnR>
-                      <a:noFill/>
-                    </a:lnR>
-                    <a:lnT>
-                      <a:noFill/>
-                    </a:lnT>
-                    <a:lnB>
-                      <a:noFill/>
-                    </a:lnB>
-                    <a:noFill/>
-                  </a:tcPr>
-                </a:tc>
-                <a:tc>
-                  <a:txBody>
-                    <a:bodyPr/>
-                    <a:lstStyle/>
-                    <a:p>
-                      <a:pPr algn="l"/>
-                      <a:r>
-                        <a:rPr sz="1050" b="0" i="0" u="none">
-                          <a:solidFill>
-                            <a:srgbClr val="64748B"/>
-                          </a:solidFill>
-                          <a:latin typeface="Inter"/>
-                        </a:rPr>
-                        <a:t>1971</a:t>
-                      </a:r>
-                    </a:p>
-                  </a:txBody>
-                  <a:tcPr marL="63500" marR="63500" marT="25400" marB="25400" anchor="ctr">
-                    <a:lnL>
-                      <a:noFill/>
-                    </a:lnL>
-                    <a:lnR>
-                      <a:noFill/>
-                    </a:lnR>
-                    <a:lnT>
-                      <a:noFill/>
-                    </a:lnT>
-                    <a:lnB>
-                      <a:noFill/>
-                    </a:lnB>
-                    <a:noFill/>
-                  </a:tcPr>
-                </a:tc>
-                <a:tc>
-                  <a:txBody>
-                    <a:bodyPr/>
-                    <a:lstStyle/>
-                    <a:p>
-                      <a:pPr algn="l"/>
-                      <a:r>
-                        <a:rPr sz="1050" b="0" i="0" u="none">
-                          <a:solidFill>
-                            <a:srgbClr val="475569"/>
-                          </a:solidFill>
-                          <a:latin typeface="Inter"/>
-                        </a:rPr>
-                        <a:t>Ultra-large integers (&gt; 10,000 digits), Pi calculation</a:t>
-                      </a:r>
-                    </a:p>
-                  </a:txBody>
-                  <a:tcPr marL="63500" marR="63500" marT="25400" marB="25400" anchor="ctr">
-                    <a:lnL>
-                      <a:noFill/>
-                    </a:lnL>
-                    <a:lnR>
-                      <a:noFill/>
-                    </a:lnR>
-                    <a:lnT>
-                      <a:noFill/>
-                    </a:lnT>
-                    <a:lnB>
-                      <a:noFill/>
-                    </a:lnB>
-                    <a:noFill/>
-                  </a:tcPr>
-                </a:tc>
-                <a:extLst>
-                  <a:ext uri="{0D108BD9-81ED-4DB2-BD59-A6C34878D82A}">
-                    <a16:rowId xmlns:a16="http://schemas.microsoft.com/office/drawing/2014/main" val="10004"/>
-                  </a:ext>
-                </a:extLst>
-              </a:tr>
-              <a:tr h="464046">
-                <a:tc>
-                  <a:txBody>
-                    <a:bodyPr/>
-                    <a:lstStyle/>
-                    <a:p>
-                      <a:pPr algn="l"/>
-                      <a:r>
-                        <a:rPr sz="1050" b="1" i="0" u="none">
-                          <a:solidFill>
-                            <a:srgbClr val="1E293B"/>
-                          </a:solidFill>
-                          <a:latin typeface="Inter"/>
-                        </a:rPr>
-                        <a:t>Harvey–Hoeven (Fürer's variant)</a:t>
-                      </a:r>
-                    </a:p>
-                  </a:txBody>
-                  <a:tcPr marL="63500" marR="63500" marT="25400" marB="25400" anchor="ctr">
-                    <a:lnL>
-                      <a:noFill/>
-                    </a:lnL>
-                    <a:lnR>
-                      <a:noFill/>
-                    </a:lnR>
-                    <a:lnT>
-                      <a:noFill/>
-                    </a:lnT>
-                    <a:lnB>
-                      <a:noFill/>
-                    </a:lnB>
-                    <a:noFill/>
-                  </a:tcPr>
-                </a:tc>
-                <a:tc>
-                  <a:txBody>
-                    <a:bodyPr/>
-                    <a:lstStyle/>
-                    <a:p>
-                      <a:pPr algn="l"/>
-                      <a:r>
-                        <a:rPr sz="1050" b="0" i="0" u="none">
-                          <a:solidFill>
-                            <a:srgbClr val="0891B2"/>
-                          </a:solidFill>
-                          <a:latin typeface="Fira Code"/>
-                        </a:rPr>
-                        <a:t>O(n log n)</a:t>
-                      </a:r>
-                    </a:p>
-                  </a:txBody>
-                  <a:tcPr marL="63500" marR="63500" marT="25400" marB="25400" anchor="ctr">
-                    <a:lnL>
-                      <a:noFill/>
-                    </a:lnL>
-                    <a:lnR>
-                      <a:noFill/>
-                    </a:lnR>
-                    <a:lnT>
-                      <a:noFill/>
-                    </a:lnT>
-                    <a:lnB>
-                      <a:noFill/>
-                    </a:lnB>
-                    <a:noFill/>
-                  </a:tcPr>
-                </a:tc>
-                <a:tc>
-                  <a:txBody>
-                    <a:bodyPr/>
-                    <a:lstStyle/>
-                    <a:p>
-                      <a:pPr algn="l"/>
-                      <a:r>
-                        <a:rPr sz="1050" b="0" i="0" u="none">
-                          <a:solidFill>
-                            <a:srgbClr val="64748B"/>
-                          </a:solidFill>
-                          <a:latin typeface="Inter"/>
-                        </a:rPr>
-                        <a:t>2019</a:t>
-                      </a:r>
-                    </a:p>
-                  </a:txBody>
-                  <a:tcPr marL="63500" marR="63500" marT="25400" marB="25400" anchor="ctr">
-                    <a:lnL>
-                      <a:noFill/>
-                    </a:lnL>
-                    <a:lnR>
-                      <a:noFill/>
-                    </a:lnR>
-                    <a:lnT>
-                      <a:noFill/>
-                    </a:lnT>
-                    <a:lnB>
-                      <a:noFill/>
-                    </a:lnB>
-                    <a:noFill/>
-                  </a:tcPr>
-                </a:tc>
-                <a:tc>
-                  <a:txBody>
-                    <a:bodyPr/>
-                    <a:lstStyle/>
-                    <a:p>
-                      <a:pPr algn="l"/>
-                      <a:r>
-                        <a:rPr sz="1050" b="0" i="0" u="none" dirty="0">
-                          <a:solidFill>
-                            <a:srgbClr val="475569"/>
-                          </a:solidFill>
-                          <a:latin typeface="Inter"/>
-                        </a:rPr>
-                        <a:t>Theoretical upper bound breakthrough; galactic algorithms</a:t>
-                      </a:r>
-                    </a:p>
-                  </a:txBody>
-                  <a:tcPr marL="63500" marR="63500" marT="25400" marB="25400" anchor="ctr">
-                    <a:lnL>
-                      <a:noFill/>
-                    </a:lnL>
-                    <a:lnR>
-                      <a:noFill/>
-                    </a:lnR>
-                    <a:lnT>
-                      <a:noFill/>
-                    </a:lnT>
-                    <a:lnB>
-                      <a:noFill/>
-                    </a:lnB>
-                    <a:noFill/>
-                  </a:tcPr>
-                </a:tc>
-                <a:extLst>
-                  <a:ext uri="{0D108BD9-81ED-4DB2-BD59-A6C34878D82A}">
-                    <a16:rowId xmlns:a16="http://schemas.microsoft.com/office/drawing/2014/main" val="10005"/>
-                  </a:ext>
-                </a:extLst>
-              </a:tr>
-            </a:tbl>
-          </a:graphicData>
-        </a:graphic>
-      </p:graphicFrame>
+              <a:rPr sz="3600" b="1" i="0" u="none">
+                <a:solidFill>
+                  <a:srgbClr val="005088"/>
+                </a:solidFill>
+                <a:latin typeface="Merriweather"/>
+              </a:rPr>
+              <a:t>Real-World Applications</a:t>
+            </a:r>
+          </a:p>
+        </p:txBody>
+      </p:sp>
     </p:spTree>
   </p:cSld>
   <p:clrMapOvr>
@@ -5491,231 +4701,123 @@
           <p:nvPr/>
         </p:nvPicPr>
         <p:blipFill>
-          <a:blip r:embed="rId2"/>
+          <a:blip r:embed="rId14"/>
           <a:stretch>
             <a:fillRect/>
           </a:stretch>
         </p:blipFill>
         <p:spPr>
           <a:xfrm>
-            <a:off x="6334125" y="1666875"/>
-            <a:ext cx="5286375" cy="3810000"/>
+            <a:off x="0" y="-22176"/>
+            <a:ext cx="12192000" cy="6858000"/>
           </a:xfrm>
           <a:prstGeom prst="rect">
             <a:avLst/>
           </a:prstGeom>
         </p:spPr>
       </p:pic>
-      <p:sp>
-        <p:nvSpPr>
-          <p:cNvPr id="3" name="TextBox 2"/>
-          <p:cNvSpPr txBox="1"/>
-          <p:nvPr/>
-        </p:nvSpPr>
-        <p:spPr>
-          <a:xfrm>
-            <a:off x="857250" y="1666875"/>
-            <a:ext cx="5000625" cy="857250"/>
-          </a:xfrm>
-          <a:prstGeom prst="rect">
-            <a:avLst/>
-          </a:prstGeom>
-          <a:noFill/>
-        </p:spPr>
-        <p:txBody>
-          <a:bodyPr wrap="square" lIns="0" tIns="0" rIns="0" bIns="0" anchor="t">
-            <a:spAutoFit/>
-          </a:bodyPr>
-          <a:lstStyle/>
-          <a:p>
-            <a:pPr algn="l">
-              <a:lnSpc>
-                <a:spcPts val="2250"/>
-              </a:lnSpc>
-            </a:pPr>
-            <a:r>
-              <a:rPr sz="1500" b="1" i="0" u="none">
-                <a:solidFill>
-                  <a:srgbClr val="334155"/>
-                </a:solidFill>
-                <a:latin typeface="DM Sans"/>
-              </a:rPr>
-              <a:t>Public-Key Cryptography:</a:t>
-            </a:r>
-            <a:r>
-              <a:rPr sz="1500" b="0" i="0" u="none">
-                <a:solidFill>
-                  <a:srgbClr val="334155"/>
-                </a:solidFill>
-                <a:latin typeface="DM Sans"/>
-              </a:rPr>
-              <a:t> Systems like RSA and Diffie-Hellman rely on multiplying primes that are hundreds or thousands of digits long to secure web traffic.</a:t>
-            </a:r>
-          </a:p>
-        </p:txBody>
-      </p:sp>
-      <p:sp>
-        <p:nvSpPr>
-          <p:cNvPr id="4" name="TextBox 3"/>
-          <p:cNvSpPr txBox="1"/>
-          <p:nvPr/>
-        </p:nvSpPr>
-        <p:spPr>
-          <a:xfrm>
-            <a:off x="857250" y="2714625"/>
-            <a:ext cx="5000625" cy="1143000"/>
-          </a:xfrm>
-          <a:prstGeom prst="rect">
-            <a:avLst/>
-          </a:prstGeom>
-          <a:noFill/>
-        </p:spPr>
-        <p:txBody>
-          <a:bodyPr wrap="square" lIns="0" tIns="0" rIns="0" bIns="0" anchor="t">
-            <a:spAutoFit/>
-          </a:bodyPr>
-          <a:lstStyle/>
-          <a:p>
-            <a:pPr algn="l">
-              <a:lnSpc>
-                <a:spcPts val="2250"/>
-              </a:lnSpc>
-            </a:pPr>
-            <a:r>
-              <a:rPr sz="1500" b="1" i="0" u="none">
-                <a:solidFill>
-                  <a:srgbClr val="334155"/>
-                </a:solidFill>
-                <a:latin typeface="DM Sans"/>
-              </a:rPr>
-              <a:t>Arbitrary-Precision Libraries:</a:t>
-            </a:r>
-            <a:r>
-              <a:rPr sz="1500" b="0" i="0" u="none">
-                <a:solidFill>
-                  <a:srgbClr val="334155"/>
-                </a:solidFill>
-                <a:latin typeface="DM Sans"/>
-              </a:rPr>
-              <a:t> Core programming languages (e.g., Python's native integer handler) use Karatsuba under the hood automatically when numbers cross a specific threshold.</a:t>
-            </a:r>
-          </a:p>
-        </p:txBody>
-      </p:sp>
-      <p:sp>
-        <p:nvSpPr>
-          <p:cNvPr id="5" name="TextBox 4"/>
-          <p:cNvSpPr txBox="1"/>
-          <p:nvPr/>
-        </p:nvSpPr>
-        <p:spPr>
-          <a:xfrm>
-            <a:off x="857250" y="4048125"/>
-            <a:ext cx="5000625" cy="857250"/>
-          </a:xfrm>
-          <a:prstGeom prst="rect">
-            <a:avLst/>
-          </a:prstGeom>
-          <a:noFill/>
-        </p:spPr>
-        <p:txBody>
-          <a:bodyPr wrap="square" lIns="0" tIns="0" rIns="0" bIns="0" anchor="t">
-            <a:spAutoFit/>
-          </a:bodyPr>
-          <a:lstStyle/>
-          <a:p>
-            <a:pPr algn="l">
-              <a:lnSpc>
-                <a:spcPts val="2250"/>
-              </a:lnSpc>
-            </a:pPr>
-            <a:r>
-              <a:rPr sz="1500" b="1" i="0" u="none">
-                <a:solidFill>
-                  <a:srgbClr val="334155"/>
-                </a:solidFill>
-                <a:latin typeface="DM Sans"/>
-              </a:rPr>
-              <a:t>Computer Algebra Systems:</a:t>
-            </a:r>
-            <a:r>
-              <a:rPr sz="1500" b="0" i="0" u="none">
-                <a:solidFill>
-                  <a:srgbClr val="334155"/>
-                </a:solidFill>
-                <a:latin typeface="DM Sans"/>
-              </a:rPr>
-              <a:t> Software like Mathematica, Maple, and MATLAB use these optimizations for complex polynomial equations.</a:t>
-            </a:r>
-          </a:p>
-        </p:txBody>
-      </p:sp>
-      <p:sp>
-        <p:nvSpPr>
-          <p:cNvPr id="6" name="TextBox 5"/>
-          <p:cNvSpPr txBox="1"/>
-          <p:nvPr/>
-        </p:nvSpPr>
-        <p:spPr>
-          <a:xfrm>
-            <a:off x="857250" y="5095875"/>
-            <a:ext cx="5000625" cy="857250"/>
-          </a:xfrm>
-          <a:prstGeom prst="rect">
-            <a:avLst/>
-          </a:prstGeom>
-          <a:noFill/>
-        </p:spPr>
-        <p:txBody>
-          <a:bodyPr wrap="square" lIns="0" tIns="0" rIns="0" bIns="0" anchor="t">
-            <a:spAutoFit/>
-          </a:bodyPr>
-          <a:lstStyle/>
-          <a:p>
-            <a:pPr algn="l">
-              <a:lnSpc>
-                <a:spcPts val="2250"/>
-              </a:lnSpc>
-            </a:pPr>
-            <a:r>
-              <a:rPr sz="1500" b="1" i="0" u="none">
-                <a:solidFill>
-                  <a:srgbClr val="334155"/>
-                </a:solidFill>
-                <a:latin typeface="DM Sans"/>
-              </a:rPr>
-              <a:t>Scientific Research:</a:t>
-            </a:r>
-            <a:r>
-              <a:rPr sz="1500" b="0" i="0" u="none">
-                <a:solidFill>
-                  <a:srgbClr val="334155"/>
-                </a:solidFill>
-                <a:latin typeface="DM Sans"/>
-              </a:rPr>
-              <a:t> High-performance computing for calculating mathematical constants ( , ) to millions of decimal places.</a:t>
-            </a:r>
-          </a:p>
-        </p:txBody>
-      </p:sp>
+      <p:pic>
+        <p:nvPicPr>
+          <p:cNvPr id="3" name="Picture 2" descr="image.png"/>
+          <p:cNvPicPr>
+            <a:picLocks noChangeAspect="1"/>
+          </p:cNvPicPr>
+          <p:nvPr/>
+        </p:nvPicPr>
+        <p:blipFill>
+          <a:blip r:embed="rId15"/>
+          <a:stretch>
+            <a:fillRect/>
+          </a:stretch>
+        </p:blipFill>
+        <p:spPr>
+          <a:xfrm>
+            <a:off x="533400" y="6419850"/>
+            <a:ext cx="11125200" cy="247650"/>
+          </a:xfrm>
+          <a:prstGeom prst="rect">
+            <a:avLst/>
+          </a:prstGeom>
+        </p:spPr>
+      </p:pic>
+      <p:pic>
+        <p:nvPicPr>
+          <p:cNvPr id="5" name="Picture 4" descr="image.png"/>
+          <p:cNvPicPr>
+            <a:picLocks noChangeAspect="1"/>
+          </p:cNvPicPr>
+          <p:nvPr>
+            <p:custDataLst>
+              <p:tags r:id="rId1"/>
+            </p:custDataLst>
+          </p:nvPr>
+        </p:nvPicPr>
+        <p:blipFill>
+          <a:blip r:embed="rId16"/>
+          <a:stretch>
+            <a:fillRect/>
+          </a:stretch>
+        </p:blipFill>
+        <p:spPr>
+          <a:xfrm>
+            <a:off x="533400" y="2454324"/>
+            <a:ext cx="3555950" cy="1625500"/>
+          </a:xfrm>
+          <a:prstGeom prst="rect">
+            <a:avLst/>
+          </a:prstGeom>
+        </p:spPr>
+      </p:pic>
+      <p:pic>
+        <p:nvPicPr>
+          <p:cNvPr id="6" name="Picture 5" descr="image.png"/>
+          <p:cNvPicPr>
+            <a:picLocks noChangeAspect="1"/>
+          </p:cNvPicPr>
+          <p:nvPr>
+            <p:custDataLst>
+              <p:tags r:id="rId2"/>
+            </p:custDataLst>
+          </p:nvPr>
+        </p:nvPicPr>
+        <p:blipFill>
+          <a:blip r:embed="rId17"/>
+          <a:stretch>
+            <a:fillRect/>
+          </a:stretch>
+        </p:blipFill>
+        <p:spPr>
+          <a:xfrm>
+            <a:off x="4317950" y="2454324"/>
+            <a:ext cx="3555950" cy="1625500"/>
+          </a:xfrm>
+          <a:prstGeom prst="rect">
+            <a:avLst/>
+          </a:prstGeom>
+        </p:spPr>
+      </p:pic>
       <p:pic>
         <p:nvPicPr>
           <p:cNvPr id="7" name="Picture 6" descr="image.png"/>
           <p:cNvPicPr>
             <a:picLocks noChangeAspect="1"/>
           </p:cNvPicPr>
-          <p:nvPr/>
+          <p:nvPr>
+            <p:custDataLst>
+              <p:tags r:id="rId3"/>
+            </p:custDataLst>
+          </p:nvPr>
         </p:nvPicPr>
         <p:blipFill>
-          <a:blip r:embed="rId3"/>
+          <a:blip r:embed="rId18"/>
           <a:stretch>
             <a:fillRect/>
           </a:stretch>
         </p:blipFill>
         <p:spPr>
           <a:xfrm>
-            <a:off x="6372225" y="1704975"/>
-            <a:ext cx="5210175" cy="3733800"/>
+            <a:off x="8102500" y="2454324"/>
+            <a:ext cx="3556099" cy="1625500"/>
           </a:xfrm>
           <a:prstGeom prst="rect">
             <a:avLst/>
@@ -5730,8 +4832,240 @@
         </p:nvSpPr>
         <p:spPr>
           <a:xfrm>
-            <a:off x="571500" y="1685925"/>
-            <a:ext cx="76200" cy="200025"/>
+            <a:off x="533400" y="419100"/>
+            <a:ext cx="11658600" cy="400050"/>
+          </a:xfrm>
+          <a:prstGeom prst="rect">
+            <a:avLst/>
+          </a:prstGeom>
+          <a:noFill/>
+        </p:spPr>
+        <p:txBody>
+          <a:bodyPr wrap="square" lIns="0" tIns="0" rIns="0" bIns="0" anchor="ctr">
+            <a:spAutoFit/>
+          </a:bodyPr>
+          <a:lstStyle/>
+          <a:p>
+            <a:pPr algn="l"/>
+            <a:r>
+              <a:rPr sz="2400" b="1" i="0" u="none">
+                <a:solidFill>
+                  <a:srgbClr val="0F172A"/>
+                </a:solidFill>
+                <a:latin typeface="Plus Jakarta Sans"/>
+              </a:rPr>
+              <a:t>13. Summary &amp; Conclusion</a:t>
+            </a:r>
+          </a:p>
+        </p:txBody>
+      </p:sp>
+      <p:sp>
+        <p:nvSpPr>
+          <p:cNvPr id="9" name="Rectangle 8"/>
+          <p:cNvSpPr/>
+          <p:nvPr/>
+        </p:nvSpPr>
+        <p:spPr>
+          <a:xfrm>
+            <a:off x="533400" y="914400"/>
+            <a:ext cx="11125200" cy="19050"/>
+          </a:xfrm>
+          <a:prstGeom prst="rect">
+            <a:avLst/>
+          </a:prstGeom>
+          <a:solidFill>
+            <a:srgbClr val="F1F5F9"/>
+          </a:solidFill>
+          <a:ln>
+            <a:noFill/>
+          </a:ln>
+          <a:effectLst/>
+        </p:spPr>
+        <p:style>
+          <a:lnRef idx="1">
+            <a:schemeClr val="accent1"/>
+          </a:lnRef>
+          <a:fillRef idx="3">
+            <a:schemeClr val="accent1"/>
+          </a:fillRef>
+          <a:effectRef idx="2">
+            <a:schemeClr val="accent1"/>
+          </a:effectRef>
+          <a:fontRef idx="minor">
+            <a:schemeClr val="lt1"/>
+          </a:fontRef>
+        </p:style>
+        <p:txBody>
+          <a:bodyPr rtlCol="0" anchor="ctr"/>
+          <a:lstStyle/>
+          <a:p>
+            <a:pPr algn="ctr"/>
+            <a:endParaRPr/>
+          </a:p>
+        </p:txBody>
+      </p:sp>
+      <p:sp>
+        <p:nvSpPr>
+          <p:cNvPr id="11" name="TextBox 10"/>
+          <p:cNvSpPr txBox="1"/>
+          <p:nvPr/>
+        </p:nvSpPr>
+        <p:spPr>
+          <a:xfrm>
+            <a:off x="533400" y="6524625"/>
+            <a:ext cx="2019300" cy="142875"/>
+          </a:xfrm>
+          <a:prstGeom prst="rect">
+            <a:avLst/>
+          </a:prstGeom>
+          <a:noFill/>
+        </p:spPr>
+        <p:txBody>
+          <a:bodyPr wrap="square" lIns="0" tIns="0" rIns="0" bIns="0" anchor="t">
+            <a:spAutoFit/>
+          </a:bodyPr>
+          <a:lstStyle/>
+          <a:p>
+            <a:pPr algn="l"/>
+            <a:r>
+              <a:rPr sz="900" b="0" i="0" u="none">
+                <a:solidFill>
+                  <a:srgbClr val="94A3B8"/>
+                </a:solidFill>
+                <a:latin typeface="Inter"/>
+              </a:rPr>
+              <a:t>Karatsuba Multiplication Presentation</a:t>
+            </a:r>
+          </a:p>
+        </p:txBody>
+      </p:sp>
+      <p:sp>
+        <p:nvSpPr>
+          <p:cNvPr id="12" name="TextBox 11"/>
+          <p:cNvSpPr txBox="1"/>
+          <p:nvPr/>
+        </p:nvSpPr>
+        <p:spPr>
+          <a:xfrm>
+            <a:off x="10953750" y="6524625"/>
+            <a:ext cx="704850" cy="142875"/>
+          </a:xfrm>
+          <a:prstGeom prst="rect">
+            <a:avLst/>
+          </a:prstGeom>
+          <a:noFill/>
+        </p:spPr>
+        <p:txBody>
+          <a:bodyPr wrap="square" lIns="0" tIns="0" rIns="0" bIns="0" anchor="t">
+            <a:spAutoFit/>
+          </a:bodyPr>
+          <a:lstStyle/>
+          <a:p>
+            <a:pPr algn="l"/>
+            <a:r>
+              <a:rPr sz="900" b="0" i="0" u="none">
+                <a:solidFill>
+                  <a:srgbClr val="94A3B8"/>
+                </a:solidFill>
+                <a:latin typeface="Inter"/>
+              </a:rPr>
+              <a:t>Slide 14 of 14</a:t>
+            </a:r>
+          </a:p>
+        </p:txBody>
+      </p:sp>
+      <p:sp>
+        <p:nvSpPr>
+          <p:cNvPr id="15" name="TextBox 14"/>
+          <p:cNvSpPr txBox="1"/>
+          <p:nvPr>
+            <p:custDataLst>
+              <p:tags r:id="rId4"/>
+            </p:custDataLst>
+          </p:nvPr>
+        </p:nvSpPr>
+        <p:spPr>
+          <a:xfrm>
+            <a:off x="771525" y="2721024"/>
+            <a:ext cx="3079700" cy="371475"/>
+          </a:xfrm>
+          <a:prstGeom prst="rect">
+            <a:avLst/>
+          </a:prstGeom>
+          <a:noFill/>
+        </p:spPr>
+        <p:txBody>
+          <a:bodyPr wrap="square" lIns="0" tIns="0" rIns="0" bIns="0" anchor="t">
+            <a:spAutoFit/>
+          </a:bodyPr>
+          <a:lstStyle/>
+          <a:p>
+            <a:pPr algn="l"/>
+            <a:r>
+              <a:rPr sz="2400" b="0" i="0" u="none">
+                <a:solidFill>
+                  <a:srgbClr val="3B82F6"/>
+                </a:solidFill>
+                <a:latin typeface="Inter ExtraBold"/>
+              </a:rPr>
+              <a:t>1960</a:t>
+            </a:r>
+          </a:p>
+        </p:txBody>
+      </p:sp>
+      <p:sp>
+        <p:nvSpPr>
+          <p:cNvPr id="16" name="TextBox 15"/>
+          <p:cNvSpPr txBox="1"/>
+          <p:nvPr>
+            <p:custDataLst>
+              <p:tags r:id="rId5"/>
+            </p:custDataLst>
+          </p:nvPr>
+        </p:nvSpPr>
+        <p:spPr>
+          <a:xfrm>
+            <a:off x="771525" y="3168699"/>
+            <a:ext cx="3079700" cy="180975"/>
+          </a:xfrm>
+          <a:prstGeom prst="rect">
+            <a:avLst/>
+          </a:prstGeom>
+          <a:noFill/>
+        </p:spPr>
+        <p:txBody>
+          <a:bodyPr wrap="square" lIns="0" tIns="0" rIns="0" bIns="0" anchor="t">
+            <a:spAutoFit/>
+          </a:bodyPr>
+          <a:lstStyle/>
+          <a:p>
+            <a:pPr algn="l"/>
+            <a:r>
+              <a:rPr sz="1125" b="1" i="0" u="none">
+                <a:solidFill>
+                  <a:srgbClr val="1E293B"/>
+                </a:solidFill>
+                <a:latin typeface="Inter"/>
+              </a:rPr>
+              <a:t>Historic Breakthrough</a:t>
+            </a:r>
+          </a:p>
+        </p:txBody>
+      </p:sp>
+      <p:sp>
+        <p:nvSpPr>
+          <p:cNvPr id="17" name="TextBox 16"/>
+          <p:cNvSpPr txBox="1"/>
+          <p:nvPr>
+            <p:custDataLst>
+              <p:tags r:id="rId6"/>
+            </p:custDataLst>
+          </p:nvPr>
+        </p:nvSpPr>
+        <p:spPr>
+          <a:xfrm>
+            <a:off x="771525" y="3406824"/>
+            <a:ext cx="3079700" cy="374015"/>
           </a:xfrm>
           <a:prstGeom prst="rect">
             <a:avLst/>
@@ -5746,31 +5080,113 @@
           <a:p>
             <a:pPr algn="l">
               <a:lnSpc>
-                <a:spcPts val="1575"/>
+                <a:spcPts val="1460"/>
               </a:lnSpc>
             </a:pPr>
             <a:r>
-              <a:rPr sz="1050" b="0" i="0" u="none">
-                <a:solidFill>
-                  <a:srgbClr val="11CAA0"/>
-                </a:solidFill>
-                <a:latin typeface="DM Sans"/>
-              </a:rPr>
-              <a:t>■</a:t>
-            </a:r>
-          </a:p>
-        </p:txBody>
-      </p:sp>
-      <p:sp>
-        <p:nvSpPr>
-          <p:cNvPr id="9" name="TextBox 8"/>
-          <p:cNvSpPr txBox="1"/>
-          <p:nvPr/>
-        </p:nvSpPr>
-        <p:spPr>
-          <a:xfrm>
-            <a:off x="571500" y="2733675"/>
-            <a:ext cx="76200" cy="200025"/>
+              <a:rPr sz="975" b="0" i="0" u="none">
+                <a:solidFill>
+                  <a:srgbClr val="64748B"/>
+                </a:solidFill>
+                <a:latin typeface="Inter"/>
+              </a:rPr>
+              <a:t>Proved that integer multiplication can be computed faster than classical O(n^2) time.</a:t>
+            </a:r>
+          </a:p>
+        </p:txBody>
+      </p:sp>
+      <p:sp>
+        <p:nvSpPr>
+          <p:cNvPr id="18" name="TextBox 17"/>
+          <p:cNvSpPr txBox="1"/>
+          <p:nvPr>
+            <p:custDataLst>
+              <p:tags r:id="rId7"/>
+            </p:custDataLst>
+          </p:nvPr>
+        </p:nvSpPr>
+        <p:spPr>
+          <a:xfrm>
+            <a:off x="4556075" y="2721024"/>
+            <a:ext cx="3079700" cy="371475"/>
+          </a:xfrm>
+          <a:prstGeom prst="rect">
+            <a:avLst/>
+          </a:prstGeom>
+          <a:noFill/>
+        </p:spPr>
+        <p:txBody>
+          <a:bodyPr wrap="square" lIns="0" tIns="0" rIns="0" bIns="0" anchor="t">
+            <a:spAutoFit/>
+          </a:bodyPr>
+          <a:lstStyle/>
+          <a:p>
+            <a:pPr algn="l"/>
+            <a:r>
+              <a:rPr sz="2400" b="0" i="0" u="none">
+                <a:solidFill>
+                  <a:srgbClr val="10B981"/>
+                </a:solidFill>
+                <a:latin typeface="Inter ExtraBold"/>
+              </a:rPr>
+              <a:t>4 → 3</a:t>
+            </a:r>
+          </a:p>
+        </p:txBody>
+      </p:sp>
+      <p:sp>
+        <p:nvSpPr>
+          <p:cNvPr id="19" name="TextBox 18"/>
+          <p:cNvSpPr txBox="1"/>
+          <p:nvPr>
+            <p:custDataLst>
+              <p:tags r:id="rId8"/>
+            </p:custDataLst>
+          </p:nvPr>
+        </p:nvSpPr>
+        <p:spPr>
+          <a:xfrm>
+            <a:off x="4556075" y="3168699"/>
+            <a:ext cx="3079700" cy="180975"/>
+          </a:xfrm>
+          <a:prstGeom prst="rect">
+            <a:avLst/>
+          </a:prstGeom>
+          <a:noFill/>
+        </p:spPr>
+        <p:txBody>
+          <a:bodyPr wrap="square" lIns="0" tIns="0" rIns="0" bIns="0" anchor="t">
+            <a:spAutoFit/>
+          </a:bodyPr>
+          <a:lstStyle/>
+          <a:p>
+            <a:pPr algn="l"/>
+            <a:r>
+              <a:rPr sz="1125" b="1" i="0" u="none">
+                <a:solidFill>
+                  <a:srgbClr val="1E293B"/>
+                </a:solidFill>
+                <a:latin typeface="Inter"/>
+              </a:rPr>
+              <a:t>Multiplication Reduction</a:t>
+            </a:r>
+          </a:p>
+        </p:txBody>
+      </p:sp>
+      <p:sp>
+        <p:nvSpPr>
+          <p:cNvPr id="20" name="TextBox 19"/>
+          <p:cNvSpPr txBox="1"/>
+          <p:nvPr>
+            <p:custDataLst>
+              <p:tags r:id="rId9"/>
+            </p:custDataLst>
+          </p:nvPr>
+        </p:nvSpPr>
+        <p:spPr>
+          <a:xfrm>
+            <a:off x="4556075" y="3406824"/>
+            <a:ext cx="3079700" cy="371475"/>
           </a:xfrm>
           <a:prstGeom prst="rect">
             <a:avLst/>
@@ -5785,31 +5201,131 @@
           <a:p>
             <a:pPr algn="l">
               <a:lnSpc>
-                <a:spcPts val="1575"/>
+                <a:spcPts val="1460"/>
               </a:lnSpc>
             </a:pPr>
             <a:r>
-              <a:rPr sz="1050" b="0" i="0" u="none">
-                <a:solidFill>
-                  <a:srgbClr val="11CAA0"/>
-                </a:solidFill>
-                <a:latin typeface="DM Sans"/>
-              </a:rPr>
-              <a:t>■</a:t>
-            </a:r>
-          </a:p>
-        </p:txBody>
-      </p:sp>
-      <p:sp>
-        <p:nvSpPr>
-          <p:cNvPr id="10" name="TextBox 9"/>
-          <p:cNvSpPr txBox="1"/>
-          <p:nvPr/>
-        </p:nvSpPr>
-        <p:spPr>
-          <a:xfrm>
-            <a:off x="571500" y="4067175"/>
-            <a:ext cx="76200" cy="200025"/>
+              <a:rPr sz="975" b="0" i="0" u="none">
+                <a:solidFill>
+                  <a:srgbClr val="64748B"/>
+                </a:solidFill>
+                <a:latin typeface="Inter"/>
+              </a:rPr>
+              <a:t>Leverages clever algebraic substitution to substitute one multiplication with additions.</a:t>
+            </a:r>
+          </a:p>
+        </p:txBody>
+      </p:sp>
+      <p:sp>
+        <p:nvSpPr>
+          <p:cNvPr id="21" name="TextBox 20"/>
+          <p:cNvSpPr txBox="1"/>
+          <p:nvPr>
+            <p:custDataLst>
+              <p:tags r:id="rId10"/>
+            </p:custDataLst>
+          </p:nvPr>
+        </p:nvSpPr>
+        <p:spPr>
+          <a:xfrm>
+            <a:off x="8340625" y="2721024"/>
+            <a:ext cx="3079849" cy="369332"/>
+          </a:xfrm>
+          <a:prstGeom prst="rect">
+            <a:avLst/>
+          </a:prstGeom>
+          <a:noFill/>
+        </p:spPr>
+        <p:txBody>
+          <a:bodyPr wrap="square" lIns="0" tIns="0" rIns="0" bIns="0" anchor="t">
+            <a:spAutoFit/>
+          </a:bodyPr>
+          <a:lstStyle/>
+          <a:p>
+            <a:pPr algn="l"/>
+            <a:r>
+              <a:rPr sz="2400" b="0" i="0" u="none" dirty="0">
+                <a:solidFill>
+                  <a:srgbClr val="8B5CF6"/>
+                </a:solidFill>
+                <a:latin typeface="Inter ExtraBold"/>
+              </a:rPr>
+              <a:t>O(n</a:t>
+            </a:r>
+            <a:r>
+              <a:rPr lang="en-IN" sz="2400" b="0" i="0" u="none" dirty="0">
+                <a:solidFill>
+                  <a:srgbClr val="8B5CF6"/>
+                </a:solidFill>
+                <a:latin typeface="Inter ExtraBold"/>
+              </a:rPr>
+              <a:t>^</a:t>
+            </a:r>
+            <a:r>
+              <a:rPr sz="2400" b="0" i="0" u="none" dirty="0">
+                <a:solidFill>
+                  <a:srgbClr val="8B5CF6"/>
+                </a:solidFill>
+                <a:latin typeface="Inter ExtraBold"/>
+              </a:rPr>
+              <a:t>1.585)</a:t>
+            </a:r>
+          </a:p>
+        </p:txBody>
+      </p:sp>
+      <p:sp>
+        <p:nvSpPr>
+          <p:cNvPr id="22" name="TextBox 21"/>
+          <p:cNvSpPr txBox="1"/>
+          <p:nvPr>
+            <p:custDataLst>
+              <p:tags r:id="rId11"/>
+            </p:custDataLst>
+          </p:nvPr>
+        </p:nvSpPr>
+        <p:spPr>
+          <a:xfrm>
+            <a:off x="8340625" y="3232100"/>
+            <a:ext cx="3079849" cy="180975"/>
+          </a:xfrm>
+          <a:prstGeom prst="rect">
+            <a:avLst/>
+          </a:prstGeom>
+          <a:noFill/>
+        </p:spPr>
+        <p:txBody>
+          <a:bodyPr wrap="square" lIns="0" tIns="0" rIns="0" bIns="0" anchor="t">
+            <a:spAutoFit/>
+          </a:bodyPr>
+          <a:lstStyle/>
+          <a:p>
+            <a:pPr algn="l"/>
+            <a:r>
+              <a:rPr sz="1125" b="1" i="0" u="none">
+                <a:solidFill>
+                  <a:srgbClr val="1E293B"/>
+                </a:solidFill>
+                <a:latin typeface="Inter"/>
+              </a:rPr>
+              <a:t>Practical Efficiency</a:t>
+            </a:r>
+          </a:p>
+        </p:txBody>
+      </p:sp>
+      <p:sp>
+        <p:nvSpPr>
+          <p:cNvPr id="23" name="TextBox 22"/>
+          <p:cNvSpPr txBox="1"/>
+          <p:nvPr>
+            <p:custDataLst>
+              <p:tags r:id="rId12"/>
+            </p:custDataLst>
+          </p:nvPr>
+        </p:nvSpPr>
+        <p:spPr>
+          <a:xfrm>
+            <a:off x="8340625" y="3470225"/>
+            <a:ext cx="3079849" cy="371475"/>
           </a:xfrm>
           <a:prstGeom prst="rect">
             <a:avLst/>
@@ -5824,139 +5340,17 @@
           <a:p>
             <a:pPr algn="l">
               <a:lnSpc>
-                <a:spcPts val="1575"/>
+                <a:spcPts val="1460"/>
               </a:lnSpc>
             </a:pPr>
             <a:r>
-              <a:rPr sz="1050" b="0" i="0" u="none">
-                <a:solidFill>
-                  <a:srgbClr val="11CAA0"/>
-                </a:solidFill>
-                <a:latin typeface="DM Sans"/>
-              </a:rPr>
-              <a:t>■</a:t>
-            </a:r>
-          </a:p>
-        </p:txBody>
-      </p:sp>
-      <p:sp>
-        <p:nvSpPr>
-          <p:cNvPr id="11" name="TextBox 10"/>
-          <p:cNvSpPr txBox="1"/>
-          <p:nvPr/>
-        </p:nvSpPr>
-        <p:spPr>
-          <a:xfrm>
-            <a:off x="571500" y="5114925"/>
-            <a:ext cx="76200" cy="200025"/>
-          </a:xfrm>
-          <a:prstGeom prst="rect">
-            <a:avLst/>
-          </a:prstGeom>
-          <a:noFill/>
-        </p:spPr>
-        <p:txBody>
-          <a:bodyPr wrap="square" lIns="0" tIns="0" rIns="0" bIns="0" anchor="t">
-            <a:spAutoFit/>
-          </a:bodyPr>
-          <a:lstStyle/>
-          <a:p>
-            <a:pPr algn="l">
-              <a:lnSpc>
-                <a:spcPts val="1575"/>
-              </a:lnSpc>
-            </a:pPr>
-            <a:r>
-              <a:rPr sz="1050" b="0" i="0" u="none">
-                <a:solidFill>
-                  <a:srgbClr val="11CAA0"/>
-                </a:solidFill>
-                <a:latin typeface="DM Sans"/>
-              </a:rPr>
-              <a:t>■</a:t>
-            </a:r>
-          </a:p>
-        </p:txBody>
-      </p:sp>
-      <p:pic>
-        <p:nvPicPr>
-          <p:cNvPr id="12" name="Picture 11" descr="image.png"/>
-          <p:cNvPicPr>
-            <a:picLocks noChangeAspect="1"/>
-          </p:cNvPicPr>
-          <p:nvPr/>
-        </p:nvPicPr>
-        <p:blipFill>
-          <a:blip r:embed="rId4"/>
-          <a:stretch>
-            <a:fillRect/>
-          </a:stretch>
-        </p:blipFill>
-        <p:spPr>
-          <a:xfrm>
-            <a:off x="4143375" y="5495925"/>
-            <a:ext cx="96291" cy="95250"/>
-          </a:xfrm>
-          <a:prstGeom prst="rect">
-            <a:avLst/>
-          </a:prstGeom>
-        </p:spPr>
-      </p:pic>
-      <p:pic>
-        <p:nvPicPr>
-          <p:cNvPr id="13" name="Picture 12" descr="image.png"/>
-          <p:cNvPicPr>
-            <a:picLocks noChangeAspect="1"/>
-          </p:cNvPicPr>
-          <p:nvPr/>
-        </p:nvPicPr>
-        <p:blipFill>
-          <a:blip r:embed="rId5"/>
-          <a:stretch>
-            <a:fillRect/>
-          </a:stretch>
-        </p:blipFill>
-        <p:spPr>
-          <a:xfrm>
-            <a:off x="4325391" y="5495925"/>
-            <a:ext cx="84683" cy="95250"/>
-          </a:xfrm>
-          <a:prstGeom prst="rect">
-            <a:avLst/>
-          </a:prstGeom>
-        </p:spPr>
-      </p:pic>
-      <p:sp>
-        <p:nvSpPr>
-          <p:cNvPr id="14" name="TextBox 13"/>
-          <p:cNvSpPr txBox="1"/>
-          <p:nvPr/>
-        </p:nvSpPr>
-        <p:spPr>
-          <a:xfrm>
-            <a:off x="571500" y="571500"/>
-            <a:ext cx="11601450" cy="571500"/>
-          </a:xfrm>
-          <a:prstGeom prst="rect">
-            <a:avLst/>
-          </a:prstGeom>
-          <a:noFill/>
-        </p:spPr>
-        <p:txBody>
-          <a:bodyPr wrap="square" lIns="0" tIns="0" rIns="0" bIns="0" anchor="t">
-            <a:spAutoFit/>
-          </a:bodyPr>
-          <a:lstStyle/>
-          <a:p>
-            <a:pPr algn="l"/>
-            <a:r>
-              <a:rPr sz="3600" b="1" i="0" u="none">
-                <a:solidFill>
-                  <a:srgbClr val="005088"/>
-                </a:solidFill>
-                <a:latin typeface="Merriweather"/>
-              </a:rPr>
-              <a:t>Real-World Applications</a:t>
+              <a:rPr sz="975" b="0" i="0" u="none">
+                <a:solidFill>
+                  <a:srgbClr val="64748B"/>
+                </a:solidFill>
+                <a:latin typeface="Inter"/>
+              </a:rPr>
+              <a:t>Serves as the foundation for high-performance big integer software world-wide.</a:t>
             </a:r>
           </a:p>
         </p:txBody>
@@ -5986,76 +5380,294 @@
           <a:chExt cx="0" cy="0"/>
         </a:xfrm>
       </p:grpSpPr>
-      <p:pic>
-        <p:nvPicPr>
-          <p:cNvPr id="2" name="Picture 1" descr="image.png"/>
-          <p:cNvPicPr>
-            <a:picLocks noChangeAspect="1"/>
-          </p:cNvPicPr>
-          <p:nvPr/>
-        </p:nvPicPr>
-        <p:blipFill>
-          <a:blip r:embed="rId14"/>
-          <a:stretch>
-            <a:fillRect/>
-          </a:stretch>
-        </p:blipFill>
-        <p:spPr>
-          <a:xfrm>
-            <a:off x="0" y="-22176"/>
-            <a:ext cx="12192000" cy="6858000"/>
-          </a:xfrm>
-          <a:prstGeom prst="rect">
-            <a:avLst/>
-          </a:prstGeom>
-        </p:spPr>
-      </p:pic>
-      <p:pic>
-        <p:nvPicPr>
-          <p:cNvPr id="3" name="Picture 2" descr="image.png"/>
-          <p:cNvPicPr>
-            <a:picLocks noChangeAspect="1"/>
-          </p:cNvPicPr>
-          <p:nvPr/>
-        </p:nvPicPr>
-        <p:blipFill>
-          <a:blip r:embed="rId15"/>
-          <a:stretch>
-            <a:fillRect/>
-          </a:stretch>
-        </p:blipFill>
-        <p:spPr>
-          <a:xfrm>
-            <a:off x="533400" y="6419850"/>
-            <a:ext cx="11125200" cy="247650"/>
-          </a:xfrm>
-          <a:prstGeom prst="rect">
-            <a:avLst/>
-          </a:prstGeom>
-        </p:spPr>
-      </p:pic>
+      <p:sp>
+        <p:nvSpPr>
+          <p:cNvPr id="2" name="TextBox 1"/>
+          <p:cNvSpPr txBox="1"/>
+          <p:nvPr/>
+        </p:nvSpPr>
+        <p:spPr>
+          <a:xfrm>
+            <a:off x="1809750" y="2447925"/>
+            <a:ext cx="9048750" cy="621517"/>
+          </a:xfrm>
+          <a:prstGeom prst="rect">
+            <a:avLst/>
+          </a:prstGeom>
+          <a:noFill/>
+        </p:spPr>
+        <p:txBody>
+          <a:bodyPr wrap="square" lIns="0" tIns="0" rIns="0" bIns="0" anchor="t">
+            <a:spAutoFit/>
+          </a:bodyPr>
+          <a:lstStyle/>
+          <a:p>
+            <a:pPr algn="l">
+              <a:lnSpc>
+                <a:spcPts val="2475"/>
+              </a:lnSpc>
+            </a:pPr>
+            <a:r>
+              <a:rPr sz="1650" b="0" i="0" u="none" dirty="0">
+                <a:solidFill>
+                  <a:srgbClr val="00B050"/>
+                </a:solidFill>
+                <a:latin typeface="DM Sans"/>
+              </a:rPr>
+              <a:t>Karatsuba, A., &amp; Ofman, Y. (1962). </a:t>
+            </a:r>
+            <a:r>
+              <a:rPr sz="1650" b="0" i="1" u="none" dirty="0">
+                <a:solidFill>
+                  <a:srgbClr val="00B050"/>
+                </a:solidFill>
+                <a:latin typeface="DM Sans"/>
+              </a:rPr>
+              <a:t>Multiplication of Many-Digital Numbers by Automatic Computers.</a:t>
+            </a:r>
+            <a:r>
+              <a:rPr sz="1650" b="0" i="0" u="none" dirty="0">
+                <a:solidFill>
+                  <a:srgbClr val="00B050"/>
+                </a:solidFill>
+                <a:latin typeface="DM Sans"/>
+              </a:rPr>
+              <a:t> </a:t>
+            </a:r>
+            <a:r>
+              <a:rPr sz="1650" b="0" i="0" u="none" dirty="0" err="1">
+                <a:solidFill>
+                  <a:srgbClr val="00B050"/>
+                </a:solidFill>
+                <a:latin typeface="DM Sans"/>
+              </a:rPr>
+              <a:t>Doklady</a:t>
+            </a:r>
+            <a:r>
+              <a:rPr sz="1650" b="0" i="0" u="none" dirty="0">
+                <a:solidFill>
+                  <a:srgbClr val="00B050"/>
+                </a:solidFill>
+                <a:latin typeface="DM Sans"/>
+              </a:rPr>
+              <a:t> </a:t>
+            </a:r>
+            <a:r>
+              <a:rPr sz="1650" b="0" i="0" u="none" dirty="0" err="1">
+                <a:solidFill>
+                  <a:srgbClr val="00B050"/>
+                </a:solidFill>
+                <a:latin typeface="DM Sans"/>
+              </a:rPr>
+              <a:t>Akademii</a:t>
+            </a:r>
+            <a:r>
+              <a:rPr sz="1650" b="0" i="0" u="none" dirty="0">
+                <a:solidFill>
+                  <a:srgbClr val="00B050"/>
+                </a:solidFill>
+                <a:latin typeface="DM Sans"/>
+              </a:rPr>
+              <a:t> </a:t>
+            </a:r>
+            <a:r>
+              <a:rPr sz="1650" b="0" i="0" u="none" dirty="0" err="1">
+                <a:solidFill>
+                  <a:srgbClr val="00B050"/>
+                </a:solidFill>
+                <a:latin typeface="DM Sans"/>
+              </a:rPr>
+              <a:t>Nauk</a:t>
+            </a:r>
+            <a:r>
+              <a:rPr sz="1650" b="0" i="0" u="none" dirty="0">
+                <a:solidFill>
+                  <a:srgbClr val="00B050"/>
+                </a:solidFill>
+                <a:latin typeface="DM Sans"/>
+              </a:rPr>
+              <a:t> SSSR. The foundational paper outlining the breakthrough.</a:t>
+            </a:r>
+          </a:p>
+        </p:txBody>
+      </p:sp>
+      <p:sp>
+        <p:nvSpPr>
+          <p:cNvPr id="3" name="TextBox 2"/>
+          <p:cNvSpPr txBox="1"/>
+          <p:nvPr/>
+        </p:nvSpPr>
+        <p:spPr>
+          <a:xfrm>
+            <a:off x="1809750" y="3629025"/>
+            <a:ext cx="9048750" cy="628650"/>
+          </a:xfrm>
+          <a:prstGeom prst="rect">
+            <a:avLst/>
+          </a:prstGeom>
+          <a:noFill/>
+        </p:spPr>
+        <p:txBody>
+          <a:bodyPr wrap="square" lIns="0" tIns="0" rIns="0" bIns="0" anchor="t">
+            <a:spAutoFit/>
+          </a:bodyPr>
+          <a:lstStyle/>
+          <a:p>
+            <a:pPr algn="l">
+              <a:lnSpc>
+                <a:spcPts val="2475"/>
+              </a:lnSpc>
+            </a:pPr>
+            <a:r>
+              <a:rPr sz="1650" b="0" i="0" u="none" dirty="0" err="1">
+                <a:solidFill>
+                  <a:srgbClr val="00B050"/>
+                </a:solidFill>
+                <a:latin typeface="DM Sans"/>
+              </a:rPr>
+              <a:t>Cormen</a:t>
+            </a:r>
+            <a:r>
+              <a:rPr sz="1650" b="0" i="0" u="none" dirty="0">
+                <a:solidFill>
+                  <a:srgbClr val="00B050"/>
+                </a:solidFill>
+                <a:latin typeface="DM Sans"/>
+              </a:rPr>
+              <a:t>, T. H., </a:t>
+            </a:r>
+            <a:r>
+              <a:rPr sz="1650" b="0" i="0" u="none" dirty="0" err="1">
+                <a:solidFill>
+                  <a:srgbClr val="00B050"/>
+                </a:solidFill>
+                <a:latin typeface="DM Sans"/>
+              </a:rPr>
+              <a:t>Leiserson</a:t>
+            </a:r>
+            <a:r>
+              <a:rPr sz="1650" b="0" i="0" u="none" dirty="0">
+                <a:solidFill>
+                  <a:srgbClr val="00B050"/>
+                </a:solidFill>
+                <a:latin typeface="DM Sans"/>
+              </a:rPr>
+              <a:t>, C. E., Rivest, R. L., &amp; Stein, C. </a:t>
+            </a:r>
+            <a:r>
+              <a:rPr sz="1650" b="0" i="1" u="none" dirty="0">
+                <a:solidFill>
+                  <a:srgbClr val="00B050"/>
+                </a:solidFill>
+                <a:latin typeface="DM Sans"/>
+              </a:rPr>
+              <a:t>Introduction to Algorithms (CLRS).</a:t>
+            </a:r>
+            <a:r>
+              <a:rPr sz="1650" b="0" i="0" u="none" dirty="0">
+                <a:solidFill>
+                  <a:srgbClr val="00B050"/>
+                </a:solidFill>
+                <a:latin typeface="DM Sans"/>
+              </a:rPr>
+              <a:t> A comprehensive textbook standard detailing recursive divide-and-conquer analysis.</a:t>
+            </a:r>
+          </a:p>
+        </p:txBody>
+      </p:sp>
+      <p:sp>
+        <p:nvSpPr>
+          <p:cNvPr id="4" name="TextBox 3"/>
+          <p:cNvSpPr txBox="1"/>
+          <p:nvPr/>
+        </p:nvSpPr>
+        <p:spPr>
+          <a:xfrm>
+            <a:off x="1809750" y="4495800"/>
+            <a:ext cx="9048750" cy="628650"/>
+          </a:xfrm>
+          <a:prstGeom prst="rect">
+            <a:avLst/>
+          </a:prstGeom>
+          <a:noFill/>
+        </p:spPr>
+        <p:txBody>
+          <a:bodyPr wrap="square" lIns="0" tIns="0" rIns="0" bIns="0" anchor="t">
+            <a:spAutoFit/>
+          </a:bodyPr>
+          <a:lstStyle/>
+          <a:p>
+            <a:pPr algn="l">
+              <a:lnSpc>
+                <a:spcPts val="2475"/>
+              </a:lnSpc>
+            </a:pPr>
+            <a:r>
+              <a:rPr sz="1650" b="0" i="0" u="none" dirty="0">
+                <a:solidFill>
+                  <a:srgbClr val="00B050"/>
+                </a:solidFill>
+                <a:latin typeface="DM Sans"/>
+              </a:rPr>
+              <a:t>Knuth, D. E. </a:t>
+            </a:r>
+            <a:r>
+              <a:rPr sz="1650" b="0" i="1" u="none" dirty="0">
+                <a:solidFill>
+                  <a:srgbClr val="00B050"/>
+                </a:solidFill>
+                <a:latin typeface="DM Sans"/>
+              </a:rPr>
+              <a:t>The Art of Computer Programming, Volume 2: </a:t>
+            </a:r>
+            <a:r>
+              <a:rPr sz="1650" b="0" i="1" u="none" dirty="0" err="1">
+                <a:solidFill>
+                  <a:srgbClr val="00B050"/>
+                </a:solidFill>
+                <a:latin typeface="DM Sans"/>
+              </a:rPr>
+              <a:t>Seminumerical</a:t>
+            </a:r>
+            <a:r>
+              <a:rPr sz="1650" b="0" i="1" u="none" dirty="0">
+                <a:solidFill>
+                  <a:srgbClr val="00B050"/>
+                </a:solidFill>
+                <a:latin typeface="DM Sans"/>
+              </a:rPr>
+              <a:t> Algorithms.</a:t>
+            </a:r>
+            <a:r>
+              <a:rPr sz="1650" b="0" i="0" u="none" dirty="0">
+                <a:solidFill>
+                  <a:srgbClr val="00B050"/>
+                </a:solidFill>
+                <a:latin typeface="DM Sans"/>
+              </a:rPr>
+              <a:t> Provides exhaustive mathematical proofs regarding integer arithmetic.</a:t>
+            </a:r>
+          </a:p>
+        </p:txBody>
+      </p:sp>
       <p:pic>
         <p:nvPicPr>
           <p:cNvPr id="5" name="Picture 4" descr="image.png"/>
           <p:cNvPicPr>
             <a:picLocks noChangeAspect="1"/>
           </p:cNvPicPr>
-          <p:nvPr>
-            <p:custDataLst>
-              <p:tags r:id="rId1"/>
-            </p:custDataLst>
-          </p:nvPr>
+          <p:nvPr/>
         </p:nvPicPr>
         <p:blipFill>
-          <a:blip r:embed="rId16"/>
+          <a:blip r:embed="rId2"/>
           <a:stretch>
             <a:fillRect/>
           </a:stretch>
         </p:blipFill>
         <p:spPr>
           <a:xfrm>
-            <a:off x="533400" y="2454324"/>
-            <a:ext cx="3555950" cy="1625500"/>
+            <a:off x="9572625" y="2799457"/>
+            <a:ext cx="1001166" cy="239017"/>
           </a:xfrm>
           <a:prstGeom prst="rect">
             <a:avLst/>
@@ -6068,22 +5680,18 @@
           <p:cNvPicPr>
             <a:picLocks noChangeAspect="1"/>
           </p:cNvPicPr>
-          <p:nvPr>
-            <p:custDataLst>
-              <p:tags r:id="rId2"/>
-            </p:custDataLst>
-          </p:nvPr>
+          <p:nvPr/>
         </p:nvPicPr>
         <p:blipFill>
-          <a:blip r:embed="rId17"/>
+          <a:blip r:embed="rId3"/>
           <a:stretch>
             <a:fillRect/>
           </a:stretch>
         </p:blipFill>
         <p:spPr>
           <a:xfrm>
-            <a:off x="4317950" y="2454324"/>
-            <a:ext cx="3555950" cy="1625500"/>
+            <a:off x="1333500" y="2457450"/>
+            <a:ext cx="200025" cy="247650"/>
           </a:xfrm>
           <a:prstGeom prst="rect">
             <a:avLst/>
@@ -6096,555 +5704,76 @@
           <p:cNvPicPr>
             <a:picLocks noChangeAspect="1"/>
           </p:cNvPicPr>
-          <p:nvPr>
-            <p:custDataLst>
-              <p:tags r:id="rId3"/>
-            </p:custDataLst>
-          </p:nvPr>
+          <p:nvPr/>
         </p:nvPicPr>
         <p:blipFill>
-          <a:blip r:embed="rId18"/>
+          <a:blip r:embed="rId3"/>
           <a:stretch>
             <a:fillRect/>
           </a:stretch>
         </p:blipFill>
         <p:spPr>
           <a:xfrm>
-            <a:off x="8102500" y="2454324"/>
-            <a:ext cx="3556099" cy="1625500"/>
+            <a:off x="1333500" y="3638550"/>
+            <a:ext cx="200025" cy="247650"/>
           </a:xfrm>
           <a:prstGeom prst="rect">
             <a:avLst/>
           </a:prstGeom>
         </p:spPr>
       </p:pic>
-      <p:sp>
-        <p:nvSpPr>
-          <p:cNvPr id="8" name="TextBox 7"/>
-          <p:cNvSpPr txBox="1"/>
-          <p:nvPr/>
-        </p:nvSpPr>
-        <p:spPr>
-          <a:xfrm>
-            <a:off x="533400" y="419100"/>
-            <a:ext cx="11658600" cy="400050"/>
-          </a:xfrm>
-          <a:prstGeom prst="rect">
-            <a:avLst/>
-          </a:prstGeom>
-          <a:noFill/>
-        </p:spPr>
-        <p:txBody>
-          <a:bodyPr wrap="square" lIns="0" tIns="0" rIns="0" bIns="0" anchor="ctr">
+      <p:pic>
+        <p:nvPicPr>
+          <p:cNvPr id="8" name="Picture 7" descr="image.png"/>
+          <p:cNvPicPr>
+            <a:picLocks noChangeAspect="1"/>
+          </p:cNvPicPr>
+          <p:nvPr/>
+        </p:nvPicPr>
+        <p:blipFill>
+          <a:blip r:embed="rId3"/>
+          <a:stretch>
+            <a:fillRect/>
+          </a:stretch>
+        </p:blipFill>
+        <p:spPr>
+          <a:xfrm>
+            <a:off x="1333500" y="4505325"/>
+            <a:ext cx="200025" cy="247650"/>
+          </a:xfrm>
+          <a:prstGeom prst="rect">
+            <a:avLst/>
+          </a:prstGeom>
+        </p:spPr>
+      </p:pic>
+      <p:sp>
+        <p:nvSpPr>
+          <p:cNvPr id="9" name="TextBox 8"/>
+          <p:cNvSpPr txBox="1"/>
+          <p:nvPr/>
+        </p:nvSpPr>
+        <p:spPr>
+          <a:xfrm>
+            <a:off x="571500" y="571500"/>
+            <a:ext cx="11601450" cy="571500"/>
+          </a:xfrm>
+          <a:prstGeom prst="rect">
+            <a:avLst/>
+          </a:prstGeom>
+          <a:noFill/>
+        </p:spPr>
+        <p:txBody>
+          <a:bodyPr wrap="square" lIns="0" tIns="0" rIns="0" bIns="0" anchor="t">
             <a:spAutoFit/>
           </a:bodyPr>
           <a:lstStyle/>
           <a:p>
             <a:pPr algn="l"/>
             <a:r>
-              <a:rPr sz="2400" b="1" i="0" u="none">
-                <a:solidFill>
-                  <a:srgbClr val="0F172A"/>
-                </a:solidFill>
-                <a:latin typeface="Plus Jakarta Sans"/>
-              </a:rPr>
-              <a:t>13. Summary &amp; Conclusion</a:t>
-            </a:r>
-          </a:p>
-        </p:txBody>
-      </p:sp>
-      <p:sp>
-        <p:nvSpPr>
-          <p:cNvPr id="9" name="Rectangle 8"/>
-          <p:cNvSpPr/>
-          <p:nvPr/>
-        </p:nvSpPr>
-        <p:spPr>
-          <a:xfrm>
-            <a:off x="533400" y="914400"/>
-            <a:ext cx="11125200" cy="19050"/>
-          </a:xfrm>
-          <a:prstGeom prst="rect">
-            <a:avLst/>
-          </a:prstGeom>
-          <a:solidFill>
-            <a:srgbClr val="F1F5F9"/>
-          </a:solidFill>
-          <a:ln>
-            <a:noFill/>
-          </a:ln>
-          <a:effectLst/>
-        </p:spPr>
-        <p:style>
-          <a:lnRef idx="1">
-            <a:schemeClr val="accent1"/>
-          </a:lnRef>
-          <a:fillRef idx="3">
-            <a:schemeClr val="accent1"/>
-          </a:fillRef>
-          <a:effectRef idx="2">
-            <a:schemeClr val="accent1"/>
-          </a:effectRef>
-          <a:fontRef idx="minor">
-            <a:schemeClr val="lt1"/>
-          </a:fontRef>
-        </p:style>
-        <p:txBody>
-          <a:bodyPr rtlCol="0" anchor="ctr"/>
-          <a:lstStyle/>
-          <a:p>
-            <a:pPr algn="ctr"/>
-            <a:endParaRPr/>
-          </a:p>
-        </p:txBody>
-      </p:sp>
-      <p:sp>
-        <p:nvSpPr>
-          <p:cNvPr id="11" name="TextBox 10"/>
-          <p:cNvSpPr txBox="1"/>
-          <p:nvPr/>
-        </p:nvSpPr>
-        <p:spPr>
-          <a:xfrm>
-            <a:off x="533400" y="6524625"/>
-            <a:ext cx="2019300" cy="142875"/>
-          </a:xfrm>
-          <a:prstGeom prst="rect">
-            <a:avLst/>
-          </a:prstGeom>
-          <a:noFill/>
-        </p:spPr>
-        <p:txBody>
-          <a:bodyPr wrap="square" lIns="0" tIns="0" rIns="0" bIns="0" anchor="t">
-            <a:spAutoFit/>
-          </a:bodyPr>
-          <a:lstStyle/>
-          <a:p>
-            <a:pPr algn="l"/>
-            <a:r>
-              <a:rPr sz="900" b="0" i="0" u="none">
-                <a:solidFill>
-                  <a:srgbClr val="94A3B8"/>
-                </a:solidFill>
-                <a:latin typeface="Inter"/>
-              </a:rPr>
-              <a:t>Karatsuba Multiplication Presentation</a:t>
-            </a:r>
-          </a:p>
-        </p:txBody>
-      </p:sp>
-      <p:sp>
-        <p:nvSpPr>
-          <p:cNvPr id="12" name="TextBox 11"/>
-          <p:cNvSpPr txBox="1"/>
-          <p:nvPr/>
-        </p:nvSpPr>
-        <p:spPr>
-          <a:xfrm>
-            <a:off x="10953750" y="6524625"/>
-            <a:ext cx="704850" cy="142875"/>
-          </a:xfrm>
-          <a:prstGeom prst="rect">
-            <a:avLst/>
-          </a:prstGeom>
-          <a:noFill/>
-        </p:spPr>
-        <p:txBody>
-          <a:bodyPr wrap="square" lIns="0" tIns="0" rIns="0" bIns="0" anchor="t">
-            <a:spAutoFit/>
-          </a:bodyPr>
-          <a:lstStyle/>
-          <a:p>
-            <a:pPr algn="l"/>
-            <a:r>
-              <a:rPr sz="900" b="0" i="0" u="none">
-                <a:solidFill>
-                  <a:srgbClr val="94A3B8"/>
-                </a:solidFill>
-                <a:latin typeface="Inter"/>
-              </a:rPr>
-              <a:t>Slide 14 of 14</a:t>
-            </a:r>
-          </a:p>
-        </p:txBody>
-      </p:sp>
-      <p:sp>
-        <p:nvSpPr>
-          <p:cNvPr id="15" name="TextBox 14"/>
-          <p:cNvSpPr txBox="1"/>
-          <p:nvPr>
-            <p:custDataLst>
-              <p:tags r:id="rId4"/>
-            </p:custDataLst>
-          </p:nvPr>
-        </p:nvSpPr>
-        <p:spPr>
-          <a:xfrm>
-            <a:off x="771525" y="2721024"/>
-            <a:ext cx="3079700" cy="371475"/>
-          </a:xfrm>
-          <a:prstGeom prst="rect">
-            <a:avLst/>
-          </a:prstGeom>
-          <a:noFill/>
-        </p:spPr>
-        <p:txBody>
-          <a:bodyPr wrap="square" lIns="0" tIns="0" rIns="0" bIns="0" anchor="t">
-            <a:spAutoFit/>
-          </a:bodyPr>
-          <a:lstStyle/>
-          <a:p>
-            <a:pPr algn="l"/>
-            <a:r>
-              <a:rPr sz="2400" b="0" i="0" u="none">
-                <a:solidFill>
-                  <a:srgbClr val="3B82F6"/>
-                </a:solidFill>
-                <a:latin typeface="Inter ExtraBold"/>
-              </a:rPr>
-              <a:t>1960</a:t>
-            </a:r>
-          </a:p>
-        </p:txBody>
-      </p:sp>
-      <p:sp>
-        <p:nvSpPr>
-          <p:cNvPr id="16" name="TextBox 15"/>
-          <p:cNvSpPr txBox="1"/>
-          <p:nvPr>
-            <p:custDataLst>
-              <p:tags r:id="rId5"/>
-            </p:custDataLst>
-          </p:nvPr>
-        </p:nvSpPr>
-        <p:spPr>
-          <a:xfrm>
-            <a:off x="771525" y="3168699"/>
-            <a:ext cx="3079700" cy="180975"/>
-          </a:xfrm>
-          <a:prstGeom prst="rect">
-            <a:avLst/>
-          </a:prstGeom>
-          <a:noFill/>
-        </p:spPr>
-        <p:txBody>
-          <a:bodyPr wrap="square" lIns="0" tIns="0" rIns="0" bIns="0" anchor="t">
-            <a:spAutoFit/>
-          </a:bodyPr>
-          <a:lstStyle/>
-          <a:p>
-            <a:pPr algn="l"/>
-            <a:r>
-              <a:rPr sz="1125" b="1" i="0" u="none">
-                <a:solidFill>
-                  <a:srgbClr val="1E293B"/>
-                </a:solidFill>
-                <a:latin typeface="Inter"/>
-              </a:rPr>
-              <a:t>Historic Breakthrough</a:t>
-            </a:r>
-          </a:p>
-        </p:txBody>
-      </p:sp>
-      <p:sp>
-        <p:nvSpPr>
-          <p:cNvPr id="17" name="TextBox 16"/>
-          <p:cNvSpPr txBox="1"/>
-          <p:nvPr>
-            <p:custDataLst>
-              <p:tags r:id="rId6"/>
-            </p:custDataLst>
-          </p:nvPr>
-        </p:nvSpPr>
-        <p:spPr>
-          <a:xfrm>
-            <a:off x="771525" y="3406824"/>
-            <a:ext cx="3079700" cy="374015"/>
-          </a:xfrm>
-          <a:prstGeom prst="rect">
-            <a:avLst/>
-          </a:prstGeom>
-          <a:noFill/>
-        </p:spPr>
-        <p:txBody>
-          <a:bodyPr wrap="square" lIns="0" tIns="0" rIns="0" bIns="0" anchor="t">
-            <a:spAutoFit/>
-          </a:bodyPr>
-          <a:lstStyle/>
-          <a:p>
-            <a:pPr algn="l">
-              <a:lnSpc>
-                <a:spcPts val="1460"/>
-              </a:lnSpc>
-            </a:pPr>
-            <a:r>
-              <a:rPr sz="975" b="0" i="0" u="none">
-                <a:solidFill>
-                  <a:srgbClr val="64748B"/>
-                </a:solidFill>
-                <a:latin typeface="Inter"/>
-              </a:rPr>
-              <a:t>Proved that integer multiplication can be computed faster than classical O(n^2) time.</a:t>
-            </a:r>
-          </a:p>
-        </p:txBody>
-      </p:sp>
-      <p:sp>
-        <p:nvSpPr>
-          <p:cNvPr id="18" name="TextBox 17"/>
-          <p:cNvSpPr txBox="1"/>
-          <p:nvPr>
-            <p:custDataLst>
-              <p:tags r:id="rId7"/>
-            </p:custDataLst>
-          </p:nvPr>
-        </p:nvSpPr>
-        <p:spPr>
-          <a:xfrm>
-            <a:off x="4556075" y="2721024"/>
-            <a:ext cx="3079700" cy="371475"/>
-          </a:xfrm>
-          <a:prstGeom prst="rect">
-            <a:avLst/>
-          </a:prstGeom>
-          <a:noFill/>
-        </p:spPr>
-        <p:txBody>
-          <a:bodyPr wrap="square" lIns="0" tIns="0" rIns="0" bIns="0" anchor="t">
-            <a:spAutoFit/>
-          </a:bodyPr>
-          <a:lstStyle/>
-          <a:p>
-            <a:pPr algn="l"/>
-            <a:r>
-              <a:rPr sz="2400" b="0" i="0" u="none">
-                <a:solidFill>
-                  <a:srgbClr val="10B981"/>
-                </a:solidFill>
-                <a:latin typeface="Inter ExtraBold"/>
-              </a:rPr>
-              <a:t>4 → 3</a:t>
-            </a:r>
-          </a:p>
-        </p:txBody>
-      </p:sp>
-      <p:sp>
-        <p:nvSpPr>
-          <p:cNvPr id="19" name="TextBox 18"/>
-          <p:cNvSpPr txBox="1"/>
-          <p:nvPr>
-            <p:custDataLst>
-              <p:tags r:id="rId8"/>
-            </p:custDataLst>
-          </p:nvPr>
-        </p:nvSpPr>
-        <p:spPr>
-          <a:xfrm>
-            <a:off x="4556075" y="3168699"/>
-            <a:ext cx="3079700" cy="180975"/>
-          </a:xfrm>
-          <a:prstGeom prst="rect">
-            <a:avLst/>
-          </a:prstGeom>
-          <a:noFill/>
-        </p:spPr>
-        <p:txBody>
-          <a:bodyPr wrap="square" lIns="0" tIns="0" rIns="0" bIns="0" anchor="t">
-            <a:spAutoFit/>
-          </a:bodyPr>
-          <a:lstStyle/>
-          <a:p>
-            <a:pPr algn="l"/>
-            <a:r>
-              <a:rPr sz="1125" b="1" i="0" u="none">
-                <a:solidFill>
-                  <a:srgbClr val="1E293B"/>
-                </a:solidFill>
-                <a:latin typeface="Inter"/>
-              </a:rPr>
-              <a:t>Multiplication Reduction</a:t>
-            </a:r>
-          </a:p>
-        </p:txBody>
-      </p:sp>
-      <p:sp>
-        <p:nvSpPr>
-          <p:cNvPr id="20" name="TextBox 19"/>
-          <p:cNvSpPr txBox="1"/>
-          <p:nvPr>
-            <p:custDataLst>
-              <p:tags r:id="rId9"/>
-            </p:custDataLst>
-          </p:nvPr>
-        </p:nvSpPr>
-        <p:spPr>
-          <a:xfrm>
-            <a:off x="4556075" y="3406824"/>
-            <a:ext cx="3079700" cy="371475"/>
-          </a:xfrm>
-          <a:prstGeom prst="rect">
-            <a:avLst/>
-          </a:prstGeom>
-          <a:noFill/>
-        </p:spPr>
-        <p:txBody>
-          <a:bodyPr wrap="square" lIns="0" tIns="0" rIns="0" bIns="0" anchor="t">
-            <a:spAutoFit/>
-          </a:bodyPr>
-          <a:lstStyle/>
-          <a:p>
-            <a:pPr algn="l">
-              <a:lnSpc>
-                <a:spcPts val="1460"/>
-              </a:lnSpc>
-            </a:pPr>
-            <a:r>
-              <a:rPr sz="975" b="0" i="0" u="none">
-                <a:solidFill>
-                  <a:srgbClr val="64748B"/>
-                </a:solidFill>
-                <a:latin typeface="Inter"/>
-              </a:rPr>
-              <a:t>Leverages clever algebraic substitution to substitute one multiplication with additions.</a:t>
-            </a:r>
-          </a:p>
-        </p:txBody>
-      </p:sp>
-      <p:sp>
-        <p:nvSpPr>
-          <p:cNvPr id="21" name="TextBox 20"/>
-          <p:cNvSpPr txBox="1"/>
-          <p:nvPr>
-            <p:custDataLst>
-              <p:tags r:id="rId10"/>
-            </p:custDataLst>
-          </p:nvPr>
-        </p:nvSpPr>
-        <p:spPr>
-          <a:xfrm>
-            <a:off x="8340625" y="2721024"/>
-            <a:ext cx="3079849" cy="369332"/>
-          </a:xfrm>
-          <a:prstGeom prst="rect">
-            <a:avLst/>
-          </a:prstGeom>
-          <a:noFill/>
-        </p:spPr>
-        <p:txBody>
-          <a:bodyPr wrap="square" lIns="0" tIns="0" rIns="0" bIns="0" anchor="t">
-            <a:spAutoFit/>
-          </a:bodyPr>
-          <a:lstStyle/>
-          <a:p>
-            <a:pPr algn="l"/>
-            <a:r>
-              <a:rPr sz="2400" b="0" i="0" u="none" dirty="0">
-                <a:solidFill>
-                  <a:srgbClr val="8B5CF6"/>
-                </a:solidFill>
-                <a:latin typeface="Inter ExtraBold"/>
-              </a:rPr>
-              <a:t>O(n</a:t>
-            </a:r>
-            <a:r>
-              <a:rPr lang="en-IN" sz="2400" b="0" i="0" u="none" dirty="0">
-                <a:solidFill>
-                  <a:srgbClr val="8B5CF6"/>
-                </a:solidFill>
-                <a:latin typeface="Inter ExtraBold"/>
-              </a:rPr>
-              <a:t>^</a:t>
-            </a:r>
-            <a:r>
-              <a:rPr sz="2400" b="0" i="0" u="none" dirty="0">
-                <a:solidFill>
-                  <a:srgbClr val="8B5CF6"/>
-                </a:solidFill>
-                <a:latin typeface="Inter ExtraBold"/>
-              </a:rPr>
-              <a:t>1.585)</a:t>
-            </a:r>
-          </a:p>
-        </p:txBody>
-      </p:sp>
-      <p:sp>
-        <p:nvSpPr>
-          <p:cNvPr id="22" name="TextBox 21"/>
-          <p:cNvSpPr txBox="1"/>
-          <p:nvPr>
-            <p:custDataLst>
-              <p:tags r:id="rId11"/>
-            </p:custDataLst>
-          </p:nvPr>
-        </p:nvSpPr>
-        <p:spPr>
-          <a:xfrm>
-            <a:off x="8340625" y="3232100"/>
-            <a:ext cx="3079849" cy="180975"/>
-          </a:xfrm>
-          <a:prstGeom prst="rect">
-            <a:avLst/>
-          </a:prstGeom>
-          <a:noFill/>
-        </p:spPr>
-        <p:txBody>
-          <a:bodyPr wrap="square" lIns="0" tIns="0" rIns="0" bIns="0" anchor="t">
-            <a:spAutoFit/>
-          </a:bodyPr>
-          <a:lstStyle/>
-          <a:p>
-            <a:pPr algn="l"/>
-            <a:r>
-              <a:rPr sz="1125" b="1" i="0" u="none">
-                <a:solidFill>
-                  <a:srgbClr val="1E293B"/>
-                </a:solidFill>
-                <a:latin typeface="Inter"/>
-              </a:rPr>
-              <a:t>Practical Efficiency</a:t>
-            </a:r>
-          </a:p>
-        </p:txBody>
-      </p:sp>
-      <p:sp>
-        <p:nvSpPr>
-          <p:cNvPr id="23" name="TextBox 22"/>
-          <p:cNvSpPr txBox="1"/>
-          <p:nvPr>
-            <p:custDataLst>
-              <p:tags r:id="rId12"/>
-            </p:custDataLst>
-          </p:nvPr>
-        </p:nvSpPr>
-        <p:spPr>
-          <a:xfrm>
-            <a:off x="8340625" y="3470225"/>
-            <a:ext cx="3079849" cy="371475"/>
-          </a:xfrm>
-          <a:prstGeom prst="rect">
-            <a:avLst/>
-          </a:prstGeom>
-          <a:noFill/>
-        </p:spPr>
-        <p:txBody>
-          <a:bodyPr wrap="square" lIns="0" tIns="0" rIns="0" bIns="0" anchor="t">
-            <a:spAutoFit/>
-          </a:bodyPr>
-          <a:lstStyle/>
-          <a:p>
-            <a:pPr algn="l">
-              <a:lnSpc>
-                <a:spcPts val="1460"/>
-              </a:lnSpc>
-            </a:pPr>
-            <a:r>
-              <a:rPr sz="975" b="0" i="0" u="none">
-                <a:solidFill>
-                  <a:srgbClr val="64748B"/>
-                </a:solidFill>
-                <a:latin typeface="Inter"/>
-              </a:rPr>
-              <a:t>Serves as the foundation for high-performance big integer software world-wide.</a:t>
+              <a:rPr sz="3600" b="1" i="0" u="none" dirty="0">
+                <a:latin typeface="Merriweather"/>
+              </a:rPr>
+              <a:t>References &amp; Further Reading</a:t>
             </a:r>
           </a:p>
         </p:txBody>
@@ -6658,429 +5787,6 @@
 </file>
 
 <file path=ppt/slides/slide14.xml><?xml version="1.0" encoding="utf-8"?>
-<p:sld xmlns:a="http://schemas.openxmlformats.org/drawingml/2006/main" xmlns:r="http://schemas.openxmlformats.org/officeDocument/2006/relationships" xmlns:p="http://schemas.openxmlformats.org/presentationml/2006/main">
-  <p:cSld>
-    <p:spTree>
-      <p:nvGrpSpPr>
-        <p:cNvPr id="1" name=""/>
-        <p:cNvGrpSpPr/>
-        <p:nvPr/>
-      </p:nvGrpSpPr>
-      <p:grpSpPr>
-        <a:xfrm>
-          <a:off x="0" y="0"/>
-          <a:ext cx="0" cy="0"/>
-          <a:chOff x="0" y="0"/>
-          <a:chExt cx="0" cy="0"/>
-        </a:xfrm>
-      </p:grpSpPr>
-      <p:sp>
-        <p:nvSpPr>
-          <p:cNvPr id="2" name="TextBox 1"/>
-          <p:cNvSpPr txBox="1"/>
-          <p:nvPr/>
-        </p:nvSpPr>
-        <p:spPr>
-          <a:xfrm>
-            <a:off x="1809750" y="2447925"/>
-            <a:ext cx="9048750" cy="621517"/>
-          </a:xfrm>
-          <a:prstGeom prst="rect">
-            <a:avLst/>
-          </a:prstGeom>
-          <a:noFill/>
-        </p:spPr>
-        <p:txBody>
-          <a:bodyPr wrap="square" lIns="0" tIns="0" rIns="0" bIns="0" anchor="t">
-            <a:spAutoFit/>
-          </a:bodyPr>
-          <a:lstStyle/>
-          <a:p>
-            <a:pPr algn="l">
-              <a:lnSpc>
-                <a:spcPts val="2475"/>
-              </a:lnSpc>
-            </a:pPr>
-            <a:r>
-              <a:rPr sz="1650" b="0" i="0" u="none" dirty="0">
-                <a:solidFill>
-                  <a:srgbClr val="00B050"/>
-                </a:solidFill>
-                <a:latin typeface="DM Sans"/>
-              </a:rPr>
-              <a:t>Karatsuba, A., &amp; Ofman, Y. (1962). </a:t>
-            </a:r>
-            <a:r>
-              <a:rPr sz="1650" b="0" i="1" u="none" dirty="0">
-                <a:solidFill>
-                  <a:srgbClr val="00B050"/>
-                </a:solidFill>
-                <a:latin typeface="DM Sans"/>
-              </a:rPr>
-              <a:t>Multiplication of Many-Digital Numbers by Automatic Computers.</a:t>
-            </a:r>
-            <a:r>
-              <a:rPr sz="1650" b="0" i="0" u="none" dirty="0">
-                <a:solidFill>
-                  <a:srgbClr val="00B050"/>
-                </a:solidFill>
-                <a:latin typeface="DM Sans"/>
-              </a:rPr>
-              <a:t> </a:t>
-            </a:r>
-            <a:r>
-              <a:rPr sz="1650" b="0" i="0" u="none" dirty="0" err="1">
-                <a:solidFill>
-                  <a:srgbClr val="00B050"/>
-                </a:solidFill>
-                <a:latin typeface="DM Sans"/>
-              </a:rPr>
-              <a:t>Doklady</a:t>
-            </a:r>
-            <a:r>
-              <a:rPr sz="1650" b="0" i="0" u="none" dirty="0">
-                <a:solidFill>
-                  <a:srgbClr val="00B050"/>
-                </a:solidFill>
-                <a:latin typeface="DM Sans"/>
-              </a:rPr>
-              <a:t> </a:t>
-            </a:r>
-            <a:r>
-              <a:rPr sz="1650" b="0" i="0" u="none" dirty="0" err="1">
-                <a:solidFill>
-                  <a:srgbClr val="00B050"/>
-                </a:solidFill>
-                <a:latin typeface="DM Sans"/>
-              </a:rPr>
-              <a:t>Akademii</a:t>
-            </a:r>
-            <a:r>
-              <a:rPr sz="1650" b="0" i="0" u="none" dirty="0">
-                <a:solidFill>
-                  <a:srgbClr val="00B050"/>
-                </a:solidFill>
-                <a:latin typeface="DM Sans"/>
-              </a:rPr>
-              <a:t> </a:t>
-            </a:r>
-            <a:r>
-              <a:rPr sz="1650" b="0" i="0" u="none" dirty="0" err="1">
-                <a:solidFill>
-                  <a:srgbClr val="00B050"/>
-                </a:solidFill>
-                <a:latin typeface="DM Sans"/>
-              </a:rPr>
-              <a:t>Nauk</a:t>
-            </a:r>
-            <a:r>
-              <a:rPr sz="1650" b="0" i="0" u="none" dirty="0">
-                <a:solidFill>
-                  <a:srgbClr val="00B050"/>
-                </a:solidFill>
-                <a:latin typeface="DM Sans"/>
-              </a:rPr>
-              <a:t> SSSR. The foundational paper outlining the breakthrough.</a:t>
-            </a:r>
-          </a:p>
-        </p:txBody>
-      </p:sp>
-      <p:sp>
-        <p:nvSpPr>
-          <p:cNvPr id="3" name="TextBox 2"/>
-          <p:cNvSpPr txBox="1"/>
-          <p:nvPr/>
-        </p:nvSpPr>
-        <p:spPr>
-          <a:xfrm>
-            <a:off x="1809750" y="3629025"/>
-            <a:ext cx="9048750" cy="628650"/>
-          </a:xfrm>
-          <a:prstGeom prst="rect">
-            <a:avLst/>
-          </a:prstGeom>
-          <a:noFill/>
-        </p:spPr>
-        <p:txBody>
-          <a:bodyPr wrap="square" lIns="0" tIns="0" rIns="0" bIns="0" anchor="t">
-            <a:spAutoFit/>
-          </a:bodyPr>
-          <a:lstStyle/>
-          <a:p>
-            <a:pPr algn="l">
-              <a:lnSpc>
-                <a:spcPts val="2475"/>
-              </a:lnSpc>
-            </a:pPr>
-            <a:r>
-              <a:rPr sz="1650" b="0" i="0" u="none" dirty="0" err="1">
-                <a:solidFill>
-                  <a:srgbClr val="00B050"/>
-                </a:solidFill>
-                <a:latin typeface="DM Sans"/>
-              </a:rPr>
-              <a:t>Cormen</a:t>
-            </a:r>
-            <a:r>
-              <a:rPr sz="1650" b="0" i="0" u="none" dirty="0">
-                <a:solidFill>
-                  <a:srgbClr val="00B050"/>
-                </a:solidFill>
-                <a:latin typeface="DM Sans"/>
-              </a:rPr>
-              <a:t>, T. H., </a:t>
-            </a:r>
-            <a:r>
-              <a:rPr sz="1650" b="0" i="0" u="none" dirty="0" err="1">
-                <a:solidFill>
-                  <a:srgbClr val="00B050"/>
-                </a:solidFill>
-                <a:latin typeface="DM Sans"/>
-              </a:rPr>
-              <a:t>Leiserson</a:t>
-            </a:r>
-            <a:r>
-              <a:rPr sz="1650" b="0" i="0" u="none" dirty="0">
-                <a:solidFill>
-                  <a:srgbClr val="00B050"/>
-                </a:solidFill>
-                <a:latin typeface="DM Sans"/>
-              </a:rPr>
-              <a:t>, C. E., Rivest, R. L., &amp; Stein, C. </a:t>
-            </a:r>
-            <a:r>
-              <a:rPr sz="1650" b="0" i="1" u="none" dirty="0">
-                <a:solidFill>
-                  <a:srgbClr val="00B050"/>
-                </a:solidFill>
-                <a:latin typeface="DM Sans"/>
-              </a:rPr>
-              <a:t>Introduction to Algorithms (CLRS).</a:t>
-            </a:r>
-            <a:r>
-              <a:rPr sz="1650" b="0" i="0" u="none" dirty="0">
-                <a:solidFill>
-                  <a:srgbClr val="00B050"/>
-                </a:solidFill>
-                <a:latin typeface="DM Sans"/>
-              </a:rPr>
-              <a:t> A comprehensive textbook standard detailing recursive divide-and-conquer analysis.</a:t>
-            </a:r>
-          </a:p>
-        </p:txBody>
-      </p:sp>
-      <p:sp>
-        <p:nvSpPr>
-          <p:cNvPr id="4" name="TextBox 3"/>
-          <p:cNvSpPr txBox="1"/>
-          <p:nvPr/>
-        </p:nvSpPr>
-        <p:spPr>
-          <a:xfrm>
-            <a:off x="1809750" y="4495800"/>
-            <a:ext cx="9048750" cy="628650"/>
-          </a:xfrm>
-          <a:prstGeom prst="rect">
-            <a:avLst/>
-          </a:prstGeom>
-          <a:noFill/>
-        </p:spPr>
-        <p:txBody>
-          <a:bodyPr wrap="square" lIns="0" tIns="0" rIns="0" bIns="0" anchor="t">
-            <a:spAutoFit/>
-          </a:bodyPr>
-          <a:lstStyle/>
-          <a:p>
-            <a:pPr algn="l">
-              <a:lnSpc>
-                <a:spcPts val="2475"/>
-              </a:lnSpc>
-            </a:pPr>
-            <a:r>
-              <a:rPr sz="1650" b="0" i="0" u="none" dirty="0">
-                <a:solidFill>
-                  <a:srgbClr val="00B050"/>
-                </a:solidFill>
-                <a:latin typeface="DM Sans"/>
-              </a:rPr>
-              <a:t>Knuth, D. E. </a:t>
-            </a:r>
-            <a:r>
-              <a:rPr sz="1650" b="0" i="1" u="none" dirty="0">
-                <a:solidFill>
-                  <a:srgbClr val="00B050"/>
-                </a:solidFill>
-                <a:latin typeface="DM Sans"/>
-              </a:rPr>
-              <a:t>The Art of Computer Programming, Volume 2: </a:t>
-            </a:r>
-            <a:r>
-              <a:rPr sz="1650" b="0" i="1" u="none" dirty="0" err="1">
-                <a:solidFill>
-                  <a:srgbClr val="00B050"/>
-                </a:solidFill>
-                <a:latin typeface="DM Sans"/>
-              </a:rPr>
-              <a:t>Seminumerical</a:t>
-            </a:r>
-            <a:r>
-              <a:rPr sz="1650" b="0" i="1" u="none" dirty="0">
-                <a:solidFill>
-                  <a:srgbClr val="00B050"/>
-                </a:solidFill>
-                <a:latin typeface="DM Sans"/>
-              </a:rPr>
-              <a:t> Algorithms.</a:t>
-            </a:r>
-            <a:r>
-              <a:rPr sz="1650" b="0" i="0" u="none" dirty="0">
-                <a:solidFill>
-                  <a:srgbClr val="00B050"/>
-                </a:solidFill>
-                <a:latin typeface="DM Sans"/>
-              </a:rPr>
-              <a:t> Provides exhaustive mathematical proofs regarding integer arithmetic.</a:t>
-            </a:r>
-          </a:p>
-        </p:txBody>
-      </p:sp>
-      <p:pic>
-        <p:nvPicPr>
-          <p:cNvPr id="5" name="Picture 4" descr="image.png"/>
-          <p:cNvPicPr>
-            <a:picLocks noChangeAspect="1"/>
-          </p:cNvPicPr>
-          <p:nvPr/>
-        </p:nvPicPr>
-        <p:blipFill>
-          <a:blip r:embed="rId2"/>
-          <a:stretch>
-            <a:fillRect/>
-          </a:stretch>
-        </p:blipFill>
-        <p:spPr>
-          <a:xfrm>
-            <a:off x="9572625" y="2799457"/>
-            <a:ext cx="1001166" cy="239017"/>
-          </a:xfrm>
-          <a:prstGeom prst="rect">
-            <a:avLst/>
-          </a:prstGeom>
-        </p:spPr>
-      </p:pic>
-      <p:pic>
-        <p:nvPicPr>
-          <p:cNvPr id="6" name="Picture 5" descr="image.png"/>
-          <p:cNvPicPr>
-            <a:picLocks noChangeAspect="1"/>
-          </p:cNvPicPr>
-          <p:nvPr/>
-        </p:nvPicPr>
-        <p:blipFill>
-          <a:blip r:embed="rId3"/>
-          <a:stretch>
-            <a:fillRect/>
-          </a:stretch>
-        </p:blipFill>
-        <p:spPr>
-          <a:xfrm>
-            <a:off x="1333500" y="2457450"/>
-            <a:ext cx="200025" cy="247650"/>
-          </a:xfrm>
-          <a:prstGeom prst="rect">
-            <a:avLst/>
-          </a:prstGeom>
-        </p:spPr>
-      </p:pic>
-      <p:pic>
-        <p:nvPicPr>
-          <p:cNvPr id="7" name="Picture 6" descr="image.png"/>
-          <p:cNvPicPr>
-            <a:picLocks noChangeAspect="1"/>
-          </p:cNvPicPr>
-          <p:nvPr/>
-        </p:nvPicPr>
-        <p:blipFill>
-          <a:blip r:embed="rId3"/>
-          <a:stretch>
-            <a:fillRect/>
-          </a:stretch>
-        </p:blipFill>
-        <p:spPr>
-          <a:xfrm>
-            <a:off x="1333500" y="3638550"/>
-            <a:ext cx="200025" cy="247650"/>
-          </a:xfrm>
-          <a:prstGeom prst="rect">
-            <a:avLst/>
-          </a:prstGeom>
-        </p:spPr>
-      </p:pic>
-      <p:pic>
-        <p:nvPicPr>
-          <p:cNvPr id="8" name="Picture 7" descr="image.png"/>
-          <p:cNvPicPr>
-            <a:picLocks noChangeAspect="1"/>
-          </p:cNvPicPr>
-          <p:nvPr/>
-        </p:nvPicPr>
-        <p:blipFill>
-          <a:blip r:embed="rId3"/>
-          <a:stretch>
-            <a:fillRect/>
-          </a:stretch>
-        </p:blipFill>
-        <p:spPr>
-          <a:xfrm>
-            <a:off x="1333500" y="4505325"/>
-            <a:ext cx="200025" cy="247650"/>
-          </a:xfrm>
-          <a:prstGeom prst="rect">
-            <a:avLst/>
-          </a:prstGeom>
-        </p:spPr>
-      </p:pic>
-      <p:sp>
-        <p:nvSpPr>
-          <p:cNvPr id="9" name="TextBox 8"/>
-          <p:cNvSpPr txBox="1"/>
-          <p:nvPr/>
-        </p:nvSpPr>
-        <p:spPr>
-          <a:xfrm>
-            <a:off x="571500" y="571500"/>
-            <a:ext cx="11601450" cy="571500"/>
-          </a:xfrm>
-          <a:prstGeom prst="rect">
-            <a:avLst/>
-          </a:prstGeom>
-          <a:noFill/>
-        </p:spPr>
-        <p:txBody>
-          <a:bodyPr wrap="square" lIns="0" tIns="0" rIns="0" bIns="0" anchor="t">
-            <a:spAutoFit/>
-          </a:bodyPr>
-          <a:lstStyle/>
-          <a:p>
-            <a:pPr algn="l"/>
-            <a:r>
-              <a:rPr sz="3600" b="1" i="0" u="none" dirty="0">
-                <a:latin typeface="Merriweather"/>
-              </a:rPr>
-              <a:t>References &amp; Further Reading</a:t>
-            </a:r>
-          </a:p>
-        </p:txBody>
-      </p:sp>
-    </p:spTree>
-  </p:cSld>
-  <p:clrMapOvr>
-    <a:masterClrMapping/>
-  </p:clrMapOvr>
-</p:sld>
-</file>
-
-<file path=ppt/slides/slide15.xml><?xml version="1.0" encoding="utf-8"?>
 <p:sld xmlns:a="http://schemas.openxmlformats.org/drawingml/2006/main" xmlns:r="http://schemas.openxmlformats.org/officeDocument/2006/relationships" xmlns:p="http://schemas.openxmlformats.org/presentationml/2006/main">
   <p:cSld>
     <p:spTree>
@@ -8894,59 +7600,135 @@
               </a:lnSpc>
             </a:pPr>
             <a:r>
-              <a:rPr sz="1050" b="0" i="0" u="none">
+              <a:rPr sz="1050" b="0" i="0" u="none" dirty="0">
                 <a:solidFill>
                   <a:srgbClr val="FBBF24"/>
                 </a:solidFill>
                 <a:latin typeface="Fira Code"/>
               </a:rPr>
-              <a:t>9 8 7 2 (4 mults)</a:t>
-            </a:r>
-            <a:r>
+              <a:t>9 8 7 2 (4 </a:t>
+            </a:r>
+            <a:r>
+              <a:rPr sz="1050" b="0" i="0" u="none" dirty="0" err="1">
+                <a:solidFill>
+                  <a:srgbClr val="FBBF24"/>
+                </a:solidFill>
+                <a:latin typeface="Fira Code"/>
+              </a:rPr>
+              <a:t>mults</a:t>
+            </a:r>
+            <a:r>
+              <a:rPr sz="1050" b="0" i="0" u="none" dirty="0">
+                <a:solidFill>
+                  <a:srgbClr val="FBBF24"/>
+                </a:solidFill>
+                <a:latin typeface="Fira Code"/>
+              </a:rPr>
+              <a:t>)</a:t>
+            </a:r>
+            <a:r>
+              <a:rPr dirty="0"/>
               <a:t>
 </a:t>
             </a:r>
             <a:r>
-              <a:rPr sz="1050" b="0" i="0" u="none">
+              <a:rPr sz="1050" b="0" i="0" u="none" dirty="0">
                 <a:solidFill>
                   <a:srgbClr val="FBBF24"/>
                 </a:solidFill>
                 <a:latin typeface="Fira Code"/>
               </a:rPr>
-              <a:t> 8 6 3 8 0 (4 mults)</a:t>
-            </a:r>
-            <a:r>
+              <a:t> 8 6 3 8 0 (4 </a:t>
+            </a:r>
+            <a:r>
+              <a:rPr sz="1050" b="0" i="0" u="none" dirty="0" err="1">
+                <a:solidFill>
+                  <a:srgbClr val="FBBF24"/>
+                </a:solidFill>
+                <a:latin typeface="Fira Code"/>
+              </a:rPr>
+              <a:t>mults</a:t>
+            </a:r>
+            <a:r>
+              <a:rPr sz="1050" b="0" i="0" u="none" dirty="0">
+                <a:solidFill>
+                  <a:srgbClr val="FBBF24"/>
+                </a:solidFill>
+                <a:latin typeface="Fira Code"/>
+              </a:rPr>
+              <a:t>)</a:t>
+            </a:r>
+            <a:r>
+              <a:rPr dirty="0"/>
               <a:t>
 </a:t>
             </a:r>
             <a:r>
-              <a:rPr sz="1050" b="0" i="0" u="none">
+              <a:rPr sz="1050" b="0" i="0" u="none" dirty="0">
                 <a:solidFill>
                   <a:srgbClr val="FBBF24"/>
                 </a:solidFill>
                 <a:latin typeface="Fira Code"/>
               </a:rPr>
-              <a:t> 7 4 0 4 0 0 (4 mults)</a:t>
-            </a:r>
-            <a:r>
+              <a:t> 7 4 0 4 0 0 (4 </a:t>
+            </a:r>
+            <a:r>
+              <a:rPr sz="1050" b="0" i="0" u="none" dirty="0" err="1">
+                <a:solidFill>
+                  <a:srgbClr val="FBBF24"/>
+                </a:solidFill>
+                <a:latin typeface="Fira Code"/>
+              </a:rPr>
+              <a:t>mults</a:t>
+            </a:r>
+            <a:r>
+              <a:rPr sz="1050" b="0" i="0" u="none" dirty="0">
+                <a:solidFill>
+                  <a:srgbClr val="FBBF24"/>
+                </a:solidFill>
+                <a:latin typeface="Fira Code"/>
+              </a:rPr>
+              <a:t>)</a:t>
+            </a:r>
+            <a:r>
+              <a:rPr dirty="0"/>
               <a:t>
 </a:t>
             </a:r>
             <a:r>
-              <a:rPr sz="1050" b="0" i="0" u="none">
+              <a:rPr sz="1050" b="0" i="0" u="none" dirty="0">
                 <a:solidFill>
                   <a:srgbClr val="FBBF24"/>
                 </a:solidFill>
                 <a:latin typeface="Fira Code"/>
               </a:rPr>
-              <a:t> 6 1 7 0 0 0 0 (4 mults)</a:t>
-            </a:r>
-            <a:r>
+              <a:t> 6 1 7 0 0 0 0 (4 </a:t>
+            </a:r>
+            <a:r>
+              <a:rPr sz="1050" b="0" i="0" u="none" dirty="0" err="1">
+                <a:solidFill>
+                  <a:srgbClr val="FBBF24"/>
+                </a:solidFill>
+                <a:latin typeface="Fira Code"/>
+              </a:rPr>
+              <a:t>mults</a:t>
+            </a:r>
+            <a:r>
+              <a:rPr sz="1050" b="0" i="0" u="none" dirty="0">
+                <a:solidFill>
+                  <a:srgbClr val="FBBF24"/>
+                </a:solidFill>
+                <a:latin typeface="Fira Code"/>
+              </a:rPr>
+              <a:t>)</a:t>
+            </a:r>
+            <a:r>
+              <a:rPr dirty="0"/>
               <a:t>
 </a:t>
             </a:r>
             <a:r>
-              <a:rPr sz="1050" b="0" i="0" u="none">
+              <a:rPr sz="1050" b="0" i="0" u="none" dirty="0">
                 <a:solidFill>
                   <a:srgbClr val="64748B"/>
                 </a:solidFill>
@@ -8955,11 +7737,12 @@
               <a:t>───────────────</a:t>
             </a:r>
             <a:r>
+              <a:rPr dirty="0"/>
               <a:t>
 </a:t>
             </a:r>
             <a:r>
-              <a:rPr sz="1050" b="1" i="0" u="none">
+              <a:rPr sz="1050" b="1" i="0" u="none" dirty="0">
                 <a:solidFill>
                   <a:srgbClr val="4ADE80"/>
                 </a:solidFill>
@@ -10370,7 +9153,7 @@
         </p:nvSpPr>
         <p:spPr>
           <a:xfrm>
-            <a:off x="533400" y="2505075"/>
+            <a:off x="771376" y="2586989"/>
             <a:ext cx="11125200" cy="161290"/>
           </a:xfrm>
           <a:prstGeom prst="rect">
@@ -10424,7 +9207,7 @@
         <p:spPr>
           <a:xfrm>
             <a:off x="533400" y="2781300"/>
-            <a:ext cx="11125200" cy="266700"/>
+            <a:ext cx="11125200" cy="207749"/>
           </a:xfrm>
           <a:prstGeom prst="rect">
             <a:avLst/>
@@ -10439,16 +9222,52 @@
           <a:p>
             <a:pPr algn="ctr"/>
             <a:r>
-              <a:rPr sz="1350" b="0" i="0" u="none">
+              <a:rPr sz="1350" b="0" i="0" u="none" dirty="0">
                 <a:solidFill>
                   <a:srgbClr val="64748B"/>
                 </a:solidFill>
                 <a:latin typeface="Fira Code"/>
               </a:rPr>
-              <a:t>X × Y = (a·10m + b)(c·10m + d) = </a:t>
-            </a:r>
-            <a:r>
-              <a:rPr sz="1350" b="1" i="0" u="none">
+              <a:t>X × Y = (a·10</a:t>
+            </a:r>
+            <a:r>
+              <a:rPr lang="en-IN" sz="1350" b="0" i="0" u="none" dirty="0">
+                <a:solidFill>
+                  <a:srgbClr val="64748B"/>
+                </a:solidFill>
+                <a:latin typeface="Fira Code"/>
+              </a:rPr>
+              <a:t>^</a:t>
+            </a:r>
+            <a:r>
+              <a:rPr sz="1350" b="0" i="0" u="none" dirty="0">
+                <a:solidFill>
+                  <a:srgbClr val="64748B"/>
+                </a:solidFill>
+                <a:latin typeface="Fira Code"/>
+              </a:rPr>
+              <a:t>m + b)(c·10</a:t>
+            </a:r>
+            <a:r>
+              <a:rPr lang="en-IN" sz="1350" b="0" i="0" u="none" dirty="0">
+                <a:solidFill>
+                  <a:srgbClr val="64748B"/>
+                </a:solidFill>
+                <a:latin typeface="Fira Code"/>
+              </a:rPr>
+              <a:t>^</a:t>
+            </a:r>
+            <a:r>
+              <a:rPr sz="1350" b="0" i="0" u="none" dirty="0">
+                <a:solidFill>
+                  <a:srgbClr val="64748B"/>
+                </a:solidFill>
+                <a:latin typeface="Fira Code"/>
+              </a:rPr>
+              <a:t>m + d) = </a:t>
+            </a:r>
+            <a:r>
+              <a:rPr sz="1350" b="1" i="0" u="none" dirty="0">
                 <a:solidFill>
                   <a:srgbClr val="EF4444"/>
                 </a:solidFill>
@@ -10457,34 +9276,79 @@
               <a:t>ac</a:t>
             </a:r>
             <a:r>
-              <a:rPr sz="1350" b="0" i="0" u="none">
+              <a:rPr sz="1350" b="0" i="0" u="none" dirty="0">
                 <a:solidFill>
                   <a:srgbClr val="64748B"/>
                 </a:solidFill>
                 <a:latin typeface="Fira Code"/>
               </a:rPr>
-              <a:t>·102m + (</a:t>
-            </a:r>
-            <a:r>
-              <a:rPr sz="1350" b="1" i="0" u="none">
+              <a:t>·10</a:t>
+            </a:r>
+            <a:r>
+              <a:rPr lang="en-IN" sz="1350" b="0" i="0" u="none" dirty="0">
+                <a:solidFill>
+                  <a:srgbClr val="64748B"/>
+                </a:solidFill>
+                <a:latin typeface="Fira Code"/>
+              </a:rPr>
+              <a:t>^</a:t>
+            </a:r>
+            <a:r>
+              <a:rPr sz="1350" b="0" i="0" u="none" dirty="0">
+                <a:solidFill>
+                  <a:srgbClr val="64748B"/>
+                </a:solidFill>
+                <a:latin typeface="Fira Code"/>
+              </a:rPr>
+              <a:t>2m + (</a:t>
+            </a:r>
+            <a:r>
+              <a:rPr sz="1350" b="1" i="0" u="none" dirty="0">
                 <a:solidFill>
                   <a:srgbClr val="EF4444"/>
                 </a:solidFill>
                 <a:latin typeface="Fira Code"/>
               </a:rPr>
-              <a:t>ad + bc</a:t>
-            </a:r>
-            <a:r>
-              <a:rPr sz="1350" b="0" i="0" u="none">
+              <a:t>ad + </a:t>
+            </a:r>
+            <a:r>
+              <a:rPr sz="1350" b="1" i="0" u="none" dirty="0" err="1">
+                <a:solidFill>
+                  <a:srgbClr val="EF4444"/>
+                </a:solidFill>
+                <a:latin typeface="Fira Code"/>
+              </a:rPr>
+              <a:t>bc</a:t>
+            </a:r>
+            <a:r>
+              <a:rPr sz="1350" b="0" i="0" u="none" dirty="0">
                 <a:solidFill>
                   <a:srgbClr val="64748B"/>
                 </a:solidFill>
                 <a:latin typeface="Fira Code"/>
               </a:rPr>
-              <a:t>)·10m + </a:t>
-            </a:r>
-            <a:r>
-              <a:rPr sz="1350" b="1" i="0" u="none">
+              <a:t>)·10</a:t>
+            </a:r>
+            <a:r>
+              <a:rPr lang="en-IN" sz="1350" b="0" i="0" u="none" dirty="0">
+                <a:solidFill>
+                  <a:srgbClr val="64748B"/>
+                </a:solidFill>
+                <a:latin typeface="Fira Code"/>
+              </a:rPr>
+              <a:t>^</a:t>
+            </a:r>
+            <a:r>
+              <a:rPr sz="1350" b="0" i="0" u="none" dirty="0">
+                <a:solidFill>
+                  <a:srgbClr val="64748B"/>
+                </a:solidFill>
+                <a:latin typeface="Fira Code"/>
+              </a:rPr>
+              <a:t>m + </a:t>
+            </a:r>
+            <a:r>
+              <a:rPr sz="1350" b="1" i="0" u="none" dirty="0">
                 <a:solidFill>
                   <a:srgbClr val="EF4444"/>
                 </a:solidFill>
@@ -10801,7 +9665,7 @@
           <a:p>
             <a:pPr algn="ctr"/>
             <a:r>
-              <a:rPr sz="1350" b="1" i="0" u="none">
+              <a:rPr sz="1350" b="1" i="0" u="none" dirty="0">
                 <a:solidFill>
                   <a:srgbClr val="15803D"/>
                 </a:solidFill>
@@ -11051,7 +9915,7 @@
         </p:blipFill>
         <p:spPr>
           <a:xfrm>
-            <a:off x="533400" y="3409950"/>
+            <a:off x="533400" y="3417816"/>
             <a:ext cx="5429250" cy="419100"/>
           </a:xfrm>
           <a:prstGeom prst="rect">
@@ -11075,7 +9939,7 @@
         </p:blipFill>
         <p:spPr>
           <a:xfrm>
-            <a:off x="533400" y="3943350"/>
+            <a:off x="533400" y="4057650"/>
             <a:ext cx="5429250" cy="419100"/>
           </a:xfrm>
           <a:prstGeom prst="rect">
@@ -11937,8 +10801,8 @@
         </p:nvSpPr>
         <p:spPr>
           <a:xfrm>
-            <a:off x="714375" y="3609975"/>
-            <a:ext cx="10763250" cy="200025"/>
+            <a:off x="714375" y="3617654"/>
+            <a:ext cx="10763250" cy="184666"/>
           </a:xfrm>
           <a:prstGeom prst="rect">
             <a:avLst/>
@@ -11953,7 +10817,7 @@
           <a:p>
             <a:pPr algn="l"/>
             <a:r>
-              <a:rPr sz="1200" b="1" i="0" u="none">
+              <a:rPr sz="1200" b="1" i="0" u="none" dirty="0">
                 <a:solidFill>
                   <a:srgbClr val="6B21A8"/>
                 </a:solidFill>
@@ -11962,7 +10826,7 @@
               <a:t>1. Middle Term Computation:</a:t>
             </a:r>
             <a:r>
-              <a:rPr sz="1200" b="0" i="0" u="none">
+              <a:rPr sz="1200" b="0" i="0" u="none" dirty="0">
                 <a:solidFill>
                   <a:srgbClr val="334155"/>
                 </a:solidFill>
@@ -11971,23 +10835,29 @@
               <a:t> </a:t>
             </a:r>
             <a:r>
-              <a:rPr sz="1200" b="0" i="0" u="none">
+              <a:rPr sz="1200" b="0" i="0" u="none" dirty="0">
                 <a:solidFill>
                   <a:srgbClr val="581C87"/>
                 </a:solidFill>
                 <a:latin typeface="Inter SemiBold"/>
               </a:rPr>
-              <a:t>Middle = P3 - P1 - P2 = 6164 - 672 - 2652 = </a:t>
-            </a:r>
-            <a:r>
-              <a:rPr sz="1200" b="0" i="0" u="none">
+              <a:t>Middle = P3 - P1 - P2 = </a:t>
+            </a:r>
+            <a:r>
+              <a:rPr lang="en-IN" sz="1200" dirty="0">
                 <a:solidFill>
                   <a:srgbClr val="581C87"/>
                 </a:solidFill>
-                <a:latin typeface="Inter Black"/>
-              </a:rPr>
-              <a:t>2840</a:t>
-            </a:r>
+                <a:latin typeface="Inter SemiBold"/>
+              </a:rPr>
+              <a:t>33  - 5 – 12 = 16</a:t>
+            </a:r>
+            <a:endParaRPr sz="1200" b="0" i="0" u="none" dirty="0">
+              <a:solidFill>
+                <a:srgbClr val="581C87"/>
+              </a:solidFill>
+              <a:latin typeface="Inter Black"/>
+            </a:endParaRPr>
           </a:p>
         </p:txBody>
       </p:sp>
@@ -12035,7 +10905,7 @@
         <p:spPr>
           <a:xfrm>
             <a:off x="676275" y="1533525"/>
-            <a:ext cx="5143500" cy="228600"/>
+            <a:ext cx="5143500" cy="207749"/>
           </a:xfrm>
           <a:prstGeom prst="rect">
             <a:avLst/>
@@ -12050,13 +10920,49 @@
           <a:p>
             <a:pPr algn="l"/>
             <a:r>
-              <a:rPr sz="1350" b="0" i="0" u="none">
+              <a:rPr sz="1350" b="0" i="0" u="none" dirty="0">
                 <a:solidFill>
                   <a:srgbClr val="0F172A"/>
                 </a:solidFill>
                 <a:latin typeface="Fira Code"/>
               </a:rPr>
-              <a:t>X = 1234, Y = 5678 (n = 4, m = 2)</a:t>
+              <a:t>X = 12, Y = 56 (n = </a:t>
+            </a:r>
+            <a:r>
+              <a:rPr lang="en-IN" sz="1350" b="0" i="0" u="none" dirty="0">
+                <a:solidFill>
+                  <a:srgbClr val="0F172A"/>
+                </a:solidFill>
+                <a:latin typeface="Fira Code"/>
+              </a:rPr>
+              <a:t>2</a:t>
+            </a:r>
+            <a:r>
+              <a:rPr sz="1350" b="0" i="0" u="none" dirty="0">
+                <a:solidFill>
+                  <a:srgbClr val="0F172A"/>
+                </a:solidFill>
+                <a:latin typeface="Fira Code"/>
+              </a:rPr>
+              <a:t>, m = </a:t>
+            </a:r>
+            <a:r>
+              <a:rPr lang="en-IN" sz="1350" dirty="0">
+                <a:solidFill>
+                  <a:srgbClr val="0F172A"/>
+                </a:solidFill>
+                <a:latin typeface="Fira Code"/>
+              </a:rPr>
+              <a:t>1</a:t>
+            </a:r>
+            <a:r>
+              <a:rPr sz="1350" b="0" i="0" u="none" dirty="0">
+                <a:solidFill>
+                  <a:srgbClr val="0F172A"/>
+                </a:solidFill>
+                <a:latin typeface="Fira Code"/>
+              </a:rPr>
+              <a:t>)</a:t>
             </a:r>
           </a:p>
         </p:txBody>
@@ -12105,7 +11011,7 @@
         <p:spPr>
           <a:xfrm>
             <a:off x="6372225" y="1533525"/>
-            <a:ext cx="5143500" cy="228600"/>
+            <a:ext cx="5143500" cy="207749"/>
           </a:xfrm>
           <a:prstGeom prst="rect">
             <a:avLst/>
@@ -12120,14 +11026,47 @@
           <a:p>
             <a:pPr algn="l"/>
             <a:r>
-              <a:rPr sz="1350" b="0" i="0" u="none">
+              <a:rPr sz="1350" b="0" i="0" u="none" dirty="0">
                 <a:solidFill>
                   <a:srgbClr val="4338CA"/>
                 </a:solidFill>
                 <a:latin typeface="Fira Code"/>
               </a:rPr>
-              <a:t>a = 12, b = 34 | c = 56, d = 78</a:t>
-            </a:r>
+              <a:t>a = 1, b = </a:t>
+            </a:r>
+            <a:r>
+              <a:rPr lang="en-IN" sz="1350" dirty="0">
+                <a:solidFill>
+                  <a:srgbClr val="4338CA"/>
+                </a:solidFill>
+                <a:latin typeface="Fira Code"/>
+              </a:rPr>
+              <a:t>2</a:t>
+            </a:r>
+            <a:r>
+              <a:rPr sz="1350" b="0" i="0" u="none" dirty="0">
+                <a:solidFill>
+                  <a:srgbClr val="4338CA"/>
+                </a:solidFill>
+                <a:latin typeface="Fira Code"/>
+              </a:rPr>
+              <a:t> | c = 5, d = </a:t>
+            </a:r>
+            <a:r>
+              <a:rPr lang="en-IN" sz="1350" dirty="0">
+                <a:solidFill>
+                  <a:srgbClr val="4338CA"/>
+                </a:solidFill>
+                <a:latin typeface="Fira Code"/>
+              </a:rPr>
+              <a:t>6</a:t>
+            </a:r>
+            <a:endParaRPr sz="1350" b="0" i="0" u="none" dirty="0">
+              <a:solidFill>
+                <a:srgbClr val="4338CA"/>
+              </a:solidFill>
+              <a:latin typeface="Fira Code"/>
+            </a:endParaRPr>
           </a:p>
         </p:txBody>
       </p:sp>
@@ -12175,7 +11114,7 @@
         <p:spPr>
           <a:xfrm>
             <a:off x="771525" y="2533650"/>
-            <a:ext cx="3079700" cy="200025"/>
+            <a:ext cx="3079700" cy="184666"/>
           </a:xfrm>
           <a:prstGeom prst="rect">
             <a:avLst/>
@@ -12190,13 +11129,13 @@
           <a:p>
             <a:pPr algn="l"/>
             <a:r>
-              <a:rPr sz="1200" b="0" i="0" u="none">
+              <a:rPr sz="1200" b="0" i="0" u="none" dirty="0">
                 <a:solidFill>
                   <a:srgbClr val="0E7490"/>
                 </a:solidFill>
                 <a:latin typeface="Fira Code"/>
               </a:rPr>
-              <a:t>12 × 56</a:t>
+              <a:t>1×5</a:t>
             </a:r>
           </a:p>
         </p:txBody>
@@ -12210,7 +11149,7 @@
         <p:spPr>
           <a:xfrm>
             <a:off x="771525" y="2790825"/>
-            <a:ext cx="3079700" cy="247650"/>
+            <a:ext cx="3079700" cy="230832"/>
           </a:xfrm>
           <a:prstGeom prst="rect">
             <a:avLst/>
@@ -12225,14 +11164,29 @@
           <a:p>
             <a:pPr algn="l"/>
             <a:r>
-              <a:rPr sz="1500" b="1" i="0" u="none">
+              <a:rPr sz="1500" b="1" i="0" u="none" dirty="0">
                 <a:solidFill>
                   <a:srgbClr val="0E7490"/>
                 </a:solidFill>
                 <a:latin typeface="Fira Code"/>
               </a:rPr>
-              <a:t>= 672</a:t>
-            </a:r>
+              <a:t>= </a:t>
+            </a:r>
+            <a:r>
+              <a:rPr lang="en-IN" sz="1500" b="1" dirty="0">
+                <a:solidFill>
+                  <a:srgbClr val="0E7490"/>
+                </a:solidFill>
+                <a:latin typeface="Fira Code"/>
+              </a:rPr>
+              <a:t>5</a:t>
+            </a:r>
+            <a:endParaRPr sz="1500" b="1" i="0" u="none" dirty="0">
+              <a:solidFill>
+                <a:srgbClr val="0E7490"/>
+              </a:solidFill>
+              <a:latin typeface="Fira Code"/>
+            </a:endParaRPr>
           </a:p>
         </p:txBody>
       </p:sp>
@@ -12279,8 +11233,8 @@
         </p:nvSpPr>
         <p:spPr>
           <a:xfrm>
-            <a:off x="4556075" y="2533650"/>
-            <a:ext cx="3079700" cy="200025"/>
+            <a:off x="4579724" y="2533650"/>
+            <a:ext cx="3079700" cy="184666"/>
           </a:xfrm>
           <a:prstGeom prst="rect">
             <a:avLst/>
@@ -12295,14 +11249,38 @@
           <a:p>
             <a:pPr algn="l"/>
             <a:r>
-              <a:rPr sz="1200" b="0" i="0" u="none">
+              <a:rPr lang="en-IN" sz="1200" dirty="0">
                 <a:solidFill>
                   <a:srgbClr val="3730A3"/>
                 </a:solidFill>
                 <a:latin typeface="Fira Code"/>
               </a:rPr>
-              <a:t>34 × 78</a:t>
-            </a:r>
+              <a:t>2</a:t>
+            </a:r>
+            <a:r>
+              <a:rPr sz="1200" b="0" i="0" u="none" dirty="0">
+                <a:solidFill>
+                  <a:srgbClr val="3730A3"/>
+                </a:solidFill>
+                <a:latin typeface="Fira Code"/>
+              </a:rPr>
+              <a:t>×</a:t>
+            </a:r>
+            <a:r>
+              <a:rPr lang="en-IN" sz="1200" dirty="0">
+                <a:solidFill>
+                  <a:srgbClr val="3730A3"/>
+                </a:solidFill>
+                <a:latin typeface="Fira Code"/>
+              </a:rPr>
+              <a:t>6</a:t>
+            </a:r>
+            <a:endParaRPr sz="1200" b="0" i="0" u="none" dirty="0">
+              <a:solidFill>
+                <a:srgbClr val="3730A3"/>
+              </a:solidFill>
+              <a:latin typeface="Fira Code"/>
+            </a:endParaRPr>
           </a:p>
         </p:txBody>
       </p:sp>
@@ -12315,7 +11293,7 @@
         <p:spPr>
           <a:xfrm>
             <a:off x="4556075" y="2790825"/>
-            <a:ext cx="3079700" cy="247650"/>
+            <a:ext cx="3079700" cy="230832"/>
           </a:xfrm>
           <a:prstGeom prst="rect">
             <a:avLst/>
@@ -12330,13 +11308,31 @@
           <a:p>
             <a:pPr algn="l"/>
             <a:r>
-              <a:rPr sz="1500" b="1" i="0" u="none">
+              <a:rPr sz="1500" b="1" i="0" u="none" dirty="0">
                 <a:solidFill>
                   <a:srgbClr val="3730A3"/>
                 </a:solidFill>
                 <a:latin typeface="Fira Code"/>
               </a:rPr>
-              <a:t>= 2652</a:t>
+              <a:t>= </a:t>
+            </a:r>
+            <a:r>
+              <a:rPr lang="en-IN" sz="1500" b="1" i="0" u="none" dirty="0">
+                <a:solidFill>
+                  <a:srgbClr val="3730A3"/>
+                </a:solidFill>
+                <a:latin typeface="Fira Code"/>
+              </a:rPr>
+              <a:t>1</a:t>
+            </a:r>
+            <a:r>
+              <a:rPr sz="1500" b="1" i="0" u="none" dirty="0">
+                <a:solidFill>
+                  <a:srgbClr val="3730A3"/>
+                </a:solidFill>
+                <a:latin typeface="Fira Code"/>
+              </a:rPr>
+              <a:t>2</a:t>
             </a:r>
           </a:p>
         </p:txBody>
@@ -12385,7 +11381,7 @@
         <p:spPr>
           <a:xfrm>
             <a:off x="8340625" y="2533650"/>
-            <a:ext cx="3079849" cy="200025"/>
+            <a:ext cx="3079849" cy="184666"/>
           </a:xfrm>
           <a:prstGeom prst="rect">
             <a:avLst/>
@@ -12400,14 +11396,83 @@
           <a:p>
             <a:pPr algn="l"/>
             <a:r>
-              <a:rPr sz="1200" b="0" i="0" u="none">
+              <a:rPr sz="1200" b="0" i="0" u="none" dirty="0">
                 <a:solidFill>
                   <a:srgbClr val="15803D"/>
                 </a:solidFill>
                 <a:latin typeface="Fira Code"/>
               </a:rPr>
-              <a:t>(12+34) × (56+78) = 46 × 134</a:t>
-            </a:r>
+              <a:t>(1</a:t>
+            </a:r>
+            <a:r>
+              <a:rPr lang="en-IN" sz="1200" dirty="0">
+                <a:solidFill>
+                  <a:srgbClr val="15803D"/>
+                </a:solidFill>
+                <a:latin typeface="Fira Code"/>
+              </a:rPr>
+              <a:t>+</a:t>
+            </a:r>
+            <a:r>
+              <a:rPr sz="1200" b="0" i="0" u="none" dirty="0">
+                <a:solidFill>
+                  <a:srgbClr val="15803D"/>
+                </a:solidFill>
+                <a:latin typeface="Fira Code"/>
+              </a:rPr>
+              <a:t>2) × (5</a:t>
+            </a:r>
+            <a:r>
+              <a:rPr lang="en-IN" sz="1200" b="0" i="0" u="none" dirty="0">
+                <a:solidFill>
+                  <a:srgbClr val="15803D"/>
+                </a:solidFill>
+                <a:latin typeface="Fira Code"/>
+              </a:rPr>
+              <a:t>+</a:t>
+            </a:r>
+            <a:r>
+              <a:rPr sz="1200" b="0" i="0" u="none" dirty="0">
+                <a:solidFill>
+                  <a:srgbClr val="15803D"/>
+                </a:solidFill>
+                <a:latin typeface="Fira Code"/>
+              </a:rPr>
+              <a:t>6) = </a:t>
+            </a:r>
+            <a:r>
+              <a:rPr lang="en-IN" sz="1200" dirty="0">
+                <a:solidFill>
+                  <a:srgbClr val="15803D"/>
+                </a:solidFill>
+                <a:latin typeface="Fira Code"/>
+              </a:rPr>
+              <a:t>3</a:t>
+            </a:r>
+            <a:r>
+              <a:rPr sz="1200" b="0" i="0" u="none" dirty="0">
+                <a:solidFill>
+                  <a:srgbClr val="15803D"/>
+                </a:solidFill>
+                <a:latin typeface="Fira Code"/>
+              </a:rPr>
+              <a:t> × </a:t>
+            </a:r>
+            <a:r>
+              <a:rPr lang="en-IN" sz="1200" dirty="0">
+                <a:solidFill>
+                  <a:srgbClr val="15803D"/>
+                </a:solidFill>
+                <a:latin typeface="Fira Code"/>
+              </a:rPr>
+              <a:t>11</a:t>
+            </a:r>
+            <a:endParaRPr sz="1200" b="0" i="0" u="none" dirty="0">
+              <a:solidFill>
+                <a:srgbClr val="15803D"/>
+              </a:solidFill>
+              <a:latin typeface="Fira Code"/>
+            </a:endParaRPr>
           </a:p>
         </p:txBody>
       </p:sp>
@@ -12420,7 +11485,7 @@
         <p:spPr>
           <a:xfrm>
             <a:off x="8340625" y="2790825"/>
-            <a:ext cx="3079849" cy="247650"/>
+            <a:ext cx="3079849" cy="230832"/>
           </a:xfrm>
           <a:prstGeom prst="rect">
             <a:avLst/>
@@ -12435,14 +11500,29 @@
           <a:p>
             <a:pPr algn="l"/>
             <a:r>
-              <a:rPr sz="1500" b="1" i="0" u="none">
+              <a:rPr sz="1500" b="1" i="0" u="none" dirty="0">
                 <a:solidFill>
                   <a:srgbClr val="15803D"/>
                 </a:solidFill>
                 <a:latin typeface="Fira Code"/>
               </a:rPr>
-              <a:t>= 6164</a:t>
-            </a:r>
+              <a:t>= </a:t>
+            </a:r>
+            <a:r>
+              <a:rPr lang="en-IN" sz="1500" b="1" dirty="0">
+                <a:solidFill>
+                  <a:srgbClr val="15803D"/>
+                </a:solidFill>
+                <a:latin typeface="Fira Code"/>
+              </a:rPr>
+              <a:t>33</a:t>
+            </a:r>
+            <a:endParaRPr sz="1500" b="1" i="0" u="none" dirty="0">
+              <a:solidFill>
+                <a:srgbClr val="15803D"/>
+              </a:solidFill>
+              <a:latin typeface="Fira Code"/>
+            </a:endParaRPr>
           </a:p>
         </p:txBody>
       </p:sp>
@@ -12505,41 +11585,38 @@
           <a:p>
             <a:pPr algn="l"/>
             <a:r>
-              <a:rPr sz="1200" b="1" i="0" u="none" dirty="0">
+              <a:rPr lang="en-IN" sz="1200" b="1" dirty="0">
                 <a:solidFill>
                   <a:srgbClr val="15803D"/>
                 </a:solidFill>
                 <a:latin typeface="Fira Code"/>
               </a:rPr>
-              <a:t>672 × 104 + 2840 × 102 + 2652 = </a:t>
-            </a:r>
-            <a:r>
-              <a:rPr sz="1200" b="0" i="0" u="none" dirty="0">
+              <a:t>5</a:t>
+            </a:r>
+            <a:r>
+              <a:rPr lang="en-IN" sz="1200" b="1" i="0" u="none" dirty="0">
                 <a:solidFill>
                   <a:srgbClr val="15803D"/>
                 </a:solidFill>
+                <a:latin typeface="Fira Code"/>
+              </a:rPr>
+              <a:t> × 10^2 + 16 × 10^1 + 12 = </a:t>
+            </a:r>
+            <a:r>
+              <a:rPr lang="en-IN" sz="1200" dirty="0">
+                <a:solidFill>
+                  <a:srgbClr val="15803D"/>
+                </a:solidFill>
                 <a:latin typeface="Fira Code Black"/>
               </a:rPr>
-              <a:t>70</a:t>
-            </a:r>
-            <a:r>
-              <a:rPr lang="en-IN" sz="1200" b="0" i="0" u="none" dirty="0">
-                <a:solidFill>
-                  <a:srgbClr val="15803D"/>
-                </a:solidFill>
-                <a:latin typeface="Fira Code Black"/>
-              </a:rPr>
-              <a:t>,</a:t>
-            </a:r>
-            <a:r>
-              <a:rPr sz="1200" b="0" i="0" u="none" dirty="0">
-                <a:solidFill>
-                  <a:srgbClr val="15803D"/>
-                </a:solidFill>
-                <a:latin typeface="Fira Code Black"/>
-              </a:rPr>
-              <a:t>06,652</a:t>
-            </a:r>
+              <a:t>672</a:t>
+            </a:r>
+            <a:endParaRPr sz="1200" b="0" i="0" u="none" dirty="0">
+              <a:solidFill>
+                <a:srgbClr val="15803D"/>
+              </a:solidFill>
+              <a:latin typeface="Fira Code Black"/>
+            </a:endParaRPr>
           </a:p>
         </p:txBody>
       </p:sp>
@@ -13892,7 +12969,7 @@
         </p:nvSpPr>
         <p:spPr>
           <a:xfrm>
-            <a:off x="457200" y="3120300"/>
+            <a:off x="470719" y="3218962"/>
             <a:ext cx="76200" cy="209550"/>
           </a:xfrm>
           <a:prstGeom prst="rect">
@@ -13927,8 +13004,8 @@
         </p:nvSpPr>
         <p:spPr>
           <a:xfrm>
-            <a:off x="533400" y="3118395"/>
-            <a:ext cx="5429250" cy="242589"/>
+            <a:off x="502365" y="3195354"/>
+            <a:ext cx="5429250" cy="199029"/>
           </a:xfrm>
           <a:prstGeom prst="rect">
             <a:avLst/>
@@ -13947,79 +13024,32 @@
               </a:lnSpc>
             </a:pPr>
             <a:r>
-              <a:rPr sz="1050" b="0" i="0" u="none">
+              <a:rPr sz="1050" b="0" i="0" u="none" dirty="0">
                 <a:solidFill>
                   <a:srgbClr val="475569"/>
                 </a:solidFill>
                 <a:latin typeface="Inter"/>
               </a:rPr>
-              <a:t>Critical exponent: c = logb(a) = log2(3) ≈ 1.585</a:t>
-            </a:r>
-          </a:p>
-        </p:txBody>
-      </p:sp>
-      <p:sp>
-        <p:nvSpPr>
-          <p:cNvPr id="21" name="TextBox 20"/>
-          <p:cNvSpPr txBox="1"/>
-          <p:nvPr/>
-        </p:nvSpPr>
-        <p:spPr>
-          <a:xfrm>
-            <a:off x="457200" y="3362890"/>
-            <a:ext cx="76200" cy="209550"/>
-          </a:xfrm>
-          <a:prstGeom prst="rect">
-            <a:avLst/>
-          </a:prstGeom>
-          <a:noFill/>
-        </p:spPr>
-        <p:txBody>
-          <a:bodyPr wrap="square" lIns="0" tIns="0" rIns="0" bIns="0" anchor="t">
-            <a:spAutoFit/>
-          </a:bodyPr>
-          <a:lstStyle/>
-          <a:p>
-            <a:pPr algn="l"/>
-            <a:r>
-              <a:rPr sz="1050" b="0" i="0" u="none">
+              <a:t>Critical exponent: c = </a:t>
+            </a:r>
+            <a:r>
+              <a:rPr sz="1050" b="0" i="0" u="none" dirty="0" err="1">
                 <a:solidFill>
                   <a:srgbClr val="475569"/>
                 </a:solidFill>
                 <a:latin typeface="Inter"/>
               </a:rPr>
-              <a:t>•</a:t>
-            </a:r>
-          </a:p>
-        </p:txBody>
-      </p:sp>
-      <p:sp>
-        <p:nvSpPr>
-          <p:cNvPr id="22" name="TextBox 21"/>
-          <p:cNvSpPr txBox="1"/>
-          <p:nvPr/>
-        </p:nvSpPr>
-        <p:spPr>
-          <a:xfrm>
-            <a:off x="533400" y="3360985"/>
-            <a:ext cx="5429250" cy="199029"/>
-          </a:xfrm>
-          <a:prstGeom prst="rect">
-            <a:avLst/>
-          </a:prstGeom>
-          <a:noFill/>
-        </p:spPr>
-        <p:txBody>
-          <a:bodyPr wrap="square" lIns="76200" tIns="0" rIns="0" bIns="0" anchor="t">
-            <a:spAutoFit/>
-          </a:bodyPr>
-          <a:lstStyle/>
-          <a:p>
-            <a:pPr algn="l">
-              <a:lnSpc>
-                <a:spcPts val="1680"/>
-              </a:lnSpc>
-            </a:pPr>
+              <a:t>logb</a:t>
+            </a:r>
+            <a:r>
+              <a:rPr lang="en-IN" sz="1050" b="0" i="0" u="none" dirty="0">
+                <a:solidFill>
+                  <a:srgbClr val="475569"/>
+                </a:solidFill>
+                <a:latin typeface="Inter"/>
+              </a:rPr>
+              <a:t>^</a:t>
+            </a:r>
             <a:r>
               <a:rPr sz="1050" b="0" i="0" u="none" dirty="0">
                 <a:solidFill>
@@ -14027,7 +13057,7 @@
                 </a:solidFill>
                 <a:latin typeface="Inter"/>
               </a:rPr>
-              <a:t>Since f(n) = O(n1) &lt; O(n</a:t>
+              <a:t>(a) = log2</a:t>
             </a:r>
             <a:r>
               <a:rPr lang="en-IN" sz="1050" b="0" i="0" u="none" dirty="0">
@@ -14045,7 +13075,7 @@
                 </a:solidFill>
                 <a:latin typeface="Inter"/>
               </a:rPr>
-              <a:t>1.585), Case 1 applies:</a:t>
+              <a:t>(3) ≈ 1.585</a:t>
             </a:r>
           </a:p>
         </p:txBody>
